--- a/output/wordlabs-market-3day.pptx
+++ b/output/wordlabs-market-3day.pptx
@@ -6057,7 +6057,7 @@
                 <a:ea typeface="Calibri" pitchFamily="34" charset="-122"/>
                 <a:cs typeface="Calibri" pitchFamily="34" charset="-120"/>
               </a:rPr>
-              <a:t>marketer</a:t>
+              <a:t>supermarket</a:t>
             </a:r>
             <a:pPr algn="l" indent="0" marL="0">
               <a:buNone/>
@@ -6071,7 +6071,7 @@
                 <a:ea typeface="Calibri" pitchFamily="34" charset="-122"/>
                 <a:cs typeface="Calibri" pitchFamily="34" charset="-120"/>
               </a:rPr>
-              <a:t> explained that </a:t>
+              <a:t> used clever </a:t>
             </a:r>
             <a:pPr algn="l" indent="0" marL="0">
               <a:buNone/>
@@ -6102,7 +6102,7 @@
                 <a:ea typeface="Calibri" pitchFamily="34" charset="-122"/>
                 <a:cs typeface="Calibri" pitchFamily="34" charset="-120"/>
               </a:rPr>
-              <a:t> your product well can help your business grow.</a:t>
+              <a:t> to get customers excited about the new products.</a:t>
             </a:r>
             <a:endParaRPr lang="en-US" sz="1800" dirty="0"/>
           </a:p>
@@ -6257,7 +6257,7 @@
                 <a:ea typeface="Trebuchet MS" pitchFamily="34" charset="-122"/>
                 <a:cs typeface="Trebuchet MS" pitchFamily="34" charset="-120"/>
               </a:rPr>
-              <a:t>marketer</a:t>
+              <a:t>supermarket</a:t>
             </a:r>
             <a:endParaRPr lang="en-US" sz="1400" dirty="0"/>
           </a:p>
@@ -6855,7 +6855,7 @@
                 <a:ea typeface="Trebuchet MS" pitchFamily="34" charset="-122"/>
                 <a:cs typeface="Trebuchet MS" pitchFamily="34" charset="-120"/>
               </a:rPr>
-              <a:t>marketer</a:t>
+              <a:t>supermarket</a:t>
             </a:r>
             <a:endParaRPr lang="en-US" sz="2800" dirty="0"/>
           </a:p>
@@ -7682,7 +7682,7 @@
                 <a:ea typeface="Trebuchet MS" pitchFamily="34" charset="-122"/>
                 <a:cs typeface="Trebuchet MS" pitchFamily="34" charset="-120"/>
               </a:rPr>
-              <a:t>marketer</a:t>
+              <a:t>supermarket</a:t>
             </a:r>
             <a:endParaRPr lang="en-US" sz="2800" dirty="0"/>
           </a:p>
@@ -7771,11 +7771,11 @@
             </a:avLst>
           </a:prstGeom>
           <a:solidFill>
-            <a:srgbClr val="CCFBF1"/>
+            <a:srgbClr val="DDD6FE"/>
           </a:solidFill>
           <a:ln w="19050">
             <a:solidFill>
-              <a:srgbClr val="0D9488"/>
+              <a:srgbClr val="7C3AED"/>
             </a:solidFill>
             <a:prstDash val="solid"/>
           </a:ln>
@@ -7815,13 +7815,13 @@
             <a:r>
               <a:rPr lang="en-US" sz="1300" b="1" dirty="0">
                 <a:solidFill>
-                  <a:srgbClr val="0F766E"/>
+                  <a:srgbClr val="4C1D95"/>
                 </a:solidFill>
                 <a:latin typeface="Trebuchet MS" pitchFamily="34" charset="0"/>
                 <a:ea typeface="Trebuchet MS" pitchFamily="34" charset="-122"/>
                 <a:cs typeface="Trebuchet MS" pitchFamily="34" charset="-120"/>
               </a:rPr>
-              <a:t>market</a:t>
+              <a:t>super</a:t>
             </a:r>
             <a:endParaRPr lang="en-US" sz="1300" dirty="0"/>
           </a:p>
@@ -7860,7 +7860,7 @@
                 <a:ea typeface="Calibri" pitchFamily="34" charset="-122"/>
                 <a:cs typeface="Calibri" pitchFamily="34" charset="-120"/>
               </a:rPr>
-              <a:t>place to buy and sell</a:t>
+              <a:t>above, beyond, larger</a:t>
             </a:r>
             <a:endParaRPr lang="en-US" sz="850" dirty="0"/>
           </a:p>
@@ -7883,11 +7883,11 @@
             </a:avLst>
           </a:prstGeom>
           <a:solidFill>
-            <a:srgbClr val="FCE7F3"/>
+            <a:srgbClr val="CCFBF1"/>
           </a:solidFill>
           <a:ln w="19050">
             <a:solidFill>
-              <a:srgbClr val="DB2777"/>
+              <a:srgbClr val="0D9488"/>
             </a:solidFill>
             <a:prstDash val="solid"/>
           </a:ln>
@@ -7927,13 +7927,13 @@
             <a:r>
               <a:rPr lang="en-US" sz="1300" b="1" dirty="0">
                 <a:solidFill>
-                  <a:srgbClr val="9D174D"/>
+                  <a:srgbClr val="0F766E"/>
                 </a:solidFill>
                 <a:latin typeface="Trebuchet MS" pitchFamily="34" charset="0"/>
                 <a:ea typeface="Trebuchet MS" pitchFamily="34" charset="-122"/>
                 <a:cs typeface="Trebuchet MS" pitchFamily="34" charset="-120"/>
               </a:rPr>
-              <a:t>er</a:t>
+              <a:t>market</a:t>
             </a:r>
             <a:endParaRPr lang="en-US" sz="1300" dirty="0"/>
           </a:p>
@@ -7972,7 +7972,7 @@
                 <a:ea typeface="Calibri" pitchFamily="34" charset="-122"/>
                 <a:cs typeface="Calibri" pitchFamily="34" charset="-120"/>
               </a:rPr>
-              <a:t>a person who does something</a:t>
+              <a:t>place to buy and sell</a:t>
             </a:r>
             <a:endParaRPr lang="en-US" sz="850" dirty="0"/>
           </a:p>
@@ -8667,7 +8667,7 @@
                 <a:ea typeface="Trebuchet MS" pitchFamily="34" charset="-122"/>
                 <a:cs typeface="Trebuchet MS" pitchFamily="34" charset="-120"/>
               </a:rPr>
-              <a:t>marketer</a:t>
+              <a:t>supermarket</a:t>
             </a:r>
             <a:endParaRPr lang="en-US" sz="2800" dirty="0"/>
           </a:p>
@@ -8756,11 +8756,11 @@
             </a:avLst>
           </a:prstGeom>
           <a:solidFill>
-            <a:srgbClr val="CCFBF1"/>
+            <a:srgbClr val="DDD6FE"/>
           </a:solidFill>
           <a:ln w="19050">
             <a:solidFill>
-              <a:srgbClr val="0D9488"/>
+              <a:srgbClr val="7C3AED"/>
             </a:solidFill>
             <a:prstDash val="solid"/>
           </a:ln>
@@ -8800,13 +8800,13 @@
             <a:r>
               <a:rPr lang="en-US" sz="1300" b="1" dirty="0">
                 <a:solidFill>
-                  <a:srgbClr val="0F766E"/>
+                  <a:srgbClr val="4C1D95"/>
                 </a:solidFill>
                 <a:latin typeface="Trebuchet MS" pitchFamily="34" charset="0"/>
                 <a:ea typeface="Trebuchet MS" pitchFamily="34" charset="-122"/>
                 <a:cs typeface="Trebuchet MS" pitchFamily="34" charset="-120"/>
               </a:rPr>
-              <a:t>market</a:t>
+              <a:t>super</a:t>
             </a:r>
             <a:endParaRPr lang="en-US" sz="1300" dirty="0"/>
           </a:p>
@@ -8845,7 +8845,7 @@
                 <a:ea typeface="Calibri" pitchFamily="34" charset="-122"/>
                 <a:cs typeface="Calibri" pitchFamily="34" charset="-120"/>
               </a:rPr>
-              <a:t>place to buy and sell</a:t>
+              <a:t>above, beyond, larger</a:t>
             </a:r>
             <a:endParaRPr lang="en-US" sz="850" dirty="0"/>
           </a:p>
@@ -8868,11 +8868,11 @@
             </a:avLst>
           </a:prstGeom>
           <a:solidFill>
-            <a:srgbClr val="FCE7F3"/>
+            <a:srgbClr val="CCFBF1"/>
           </a:solidFill>
           <a:ln w="19050">
             <a:solidFill>
-              <a:srgbClr val="DB2777"/>
+              <a:srgbClr val="0D9488"/>
             </a:solidFill>
             <a:prstDash val="solid"/>
           </a:ln>
@@ -8912,13 +8912,13 @@
             <a:r>
               <a:rPr lang="en-US" sz="1300" b="1" dirty="0">
                 <a:solidFill>
-                  <a:srgbClr val="9D174D"/>
+                  <a:srgbClr val="0F766E"/>
                 </a:solidFill>
                 <a:latin typeface="Trebuchet MS" pitchFamily="34" charset="0"/>
                 <a:ea typeface="Trebuchet MS" pitchFamily="34" charset="-122"/>
                 <a:cs typeface="Trebuchet MS" pitchFamily="34" charset="-120"/>
               </a:rPr>
-              <a:t>er</a:t>
+              <a:t>market</a:t>
             </a:r>
             <a:endParaRPr lang="en-US" sz="1300" dirty="0"/>
           </a:p>
@@ -8957,7 +8957,7 @@
                 <a:ea typeface="Calibri" pitchFamily="34" charset="-122"/>
                 <a:cs typeface="Calibri" pitchFamily="34" charset="-120"/>
               </a:rPr>
-              <a:t>a person who does something</a:t>
+              <a:t>place to buy and sell</a:t>
             </a:r>
             <a:endParaRPr lang="en-US" sz="850" dirty="0"/>
           </a:p>
@@ -9064,8 +9064,8 @@
         </p:nvSpPr>
         <p:spPr>
           <a:xfrm>
-            <a:off x="2313432" y="3364992"/>
-            <a:ext cx="1645920" cy="475488"/>
+            <a:off x="1975104" y="3364992"/>
+            <a:ext cx="1554480" cy="475488"/>
           </a:xfrm>
           <a:prstGeom prst="rect">
             <a:avLst>
@@ -9091,8 +9091,8 @@
         </p:nvSpPr>
         <p:spPr>
           <a:xfrm>
-            <a:off x="2313432" y="3364992"/>
-            <a:ext cx="1645920" cy="475488"/>
+            <a:off x="1975104" y="3364992"/>
+            <a:ext cx="1554480" cy="475488"/>
           </a:xfrm>
           <a:prstGeom prst="rect">
             <a:avLst/>
@@ -9116,7 +9116,7 @@
                 <a:ea typeface="Trebuchet MS" pitchFamily="34" charset="-122"/>
                 <a:cs typeface="Trebuchet MS" pitchFamily="34" charset="-120"/>
               </a:rPr>
-              <a:t>mar</a:t>
+              <a:t>su</a:t>
             </a:r>
             <a:endParaRPr lang="en-US" sz="1400" dirty="0"/>
           </a:p>
@@ -9130,8 +9130,8 @@
         </p:nvSpPr>
         <p:spPr>
           <a:xfrm>
-            <a:off x="3959352" y="3364992"/>
-            <a:ext cx="411480" cy="475488"/>
+            <a:off x="3529584" y="3364992"/>
+            <a:ext cx="73152" cy="475488"/>
           </a:xfrm>
           <a:prstGeom prst="rect">
             <a:avLst/>
@@ -9169,8 +9169,8 @@
         </p:nvSpPr>
         <p:spPr>
           <a:xfrm>
-            <a:off x="4370832" y="3364992"/>
-            <a:ext cx="1645920" cy="475488"/>
+            <a:off x="3602736" y="3364992"/>
+            <a:ext cx="1554480" cy="475488"/>
           </a:xfrm>
           <a:prstGeom prst="rect">
             <a:avLst>
@@ -9196,8 +9196,8 @@
         </p:nvSpPr>
         <p:spPr>
           <a:xfrm>
-            <a:off x="4370832" y="3364992"/>
-            <a:ext cx="1645920" cy="475488"/>
+            <a:off x="3602736" y="3364992"/>
+            <a:ext cx="1554480" cy="475488"/>
           </a:xfrm>
           <a:prstGeom prst="rect">
             <a:avLst/>
@@ -9221,7 +9221,7 @@
                 <a:ea typeface="Trebuchet MS" pitchFamily="34" charset="-122"/>
                 <a:cs typeface="Trebuchet MS" pitchFamily="34" charset="-120"/>
               </a:rPr>
-              <a:t>ket</a:t>
+              <a:t>per</a:t>
             </a:r>
             <a:endParaRPr lang="en-US" sz="1400" dirty="0"/>
           </a:p>
@@ -9235,8 +9235,8 @@
         </p:nvSpPr>
         <p:spPr>
           <a:xfrm>
-            <a:off x="6016752" y="3364992"/>
-            <a:ext cx="411480" cy="475488"/>
+            <a:off x="5157216" y="3364992"/>
+            <a:ext cx="73152" cy="475488"/>
           </a:xfrm>
           <a:prstGeom prst="rect">
             <a:avLst/>
@@ -9274,8 +9274,8 @@
         </p:nvSpPr>
         <p:spPr>
           <a:xfrm>
-            <a:off x="6428232" y="3364992"/>
-            <a:ext cx="1645920" cy="475488"/>
+            <a:off x="5230368" y="3364992"/>
+            <a:ext cx="1554480" cy="475488"/>
           </a:xfrm>
           <a:prstGeom prst="rect">
             <a:avLst>
@@ -9301,8 +9301,8 @@
         </p:nvSpPr>
         <p:spPr>
           <a:xfrm>
-            <a:off x="6428232" y="3364992"/>
-            <a:ext cx="1645920" cy="475488"/>
+            <a:off x="5230368" y="3364992"/>
+            <a:ext cx="1554480" cy="475488"/>
           </a:xfrm>
           <a:prstGeom prst="rect">
             <a:avLst/>
@@ -9326,7 +9326,7 @@
                 <a:ea typeface="Trebuchet MS" pitchFamily="34" charset="-122"/>
                 <a:cs typeface="Trebuchet MS" pitchFamily="34" charset="-120"/>
               </a:rPr>
-              <a:t>er</a:t>
+              <a:t>mar</a:t>
             </a:r>
             <a:endParaRPr lang="en-US" sz="1400" dirty="0"/>
           </a:p>
@@ -9334,7 +9334,112 @@
       </p:sp>
       <p:sp>
         <p:nvSpPr>
-          <p:cNvPr id="33" name="Shape 31"/>
+          <p:cNvPr id="33" name="Text 31"/>
+          <p:cNvSpPr/>
+          <p:nvPr/>
+        </p:nvSpPr>
+        <p:spPr>
+          <a:xfrm>
+            <a:off x="6784848" y="3364992"/>
+            <a:ext cx="73152" cy="475488"/>
+          </a:xfrm>
+          <a:prstGeom prst="rect">
+            <a:avLst/>
+          </a:prstGeom>
+          <a:noFill/>
+          <a:ln/>
+        </p:spPr>
+        <p:txBody>
+          <a:bodyPr wrap="square" lIns="0" tIns="0" rIns="0" bIns="0" rtlCol="0" anchor="ctr"/>
+          <a:lstStyle/>
+          <a:p>
+            <a:pPr algn="ctr" indent="0" marL="0">
+              <a:buNone/>
+            </a:pPr>
+            <a:r>
+              <a:rPr lang="en-US" sz="1600" b="1" dirty="0">
+                <a:solidFill>
+                  <a:srgbClr val="0D9488"/>
+                </a:solidFill>
+                <a:latin typeface="Trebuchet MS" pitchFamily="34" charset="0"/>
+                <a:ea typeface="Trebuchet MS" pitchFamily="34" charset="-122"/>
+                <a:cs typeface="Trebuchet MS" pitchFamily="34" charset="-120"/>
+              </a:rPr>
+              <a:t>·</a:t>
+            </a:r>
+            <a:endParaRPr lang="en-US" sz="1600" dirty="0"/>
+          </a:p>
+        </p:txBody>
+      </p:sp>
+      <p:sp>
+        <p:nvSpPr>
+          <p:cNvPr id="34" name="Shape 32"/>
+          <p:cNvSpPr/>
+          <p:nvPr/>
+        </p:nvSpPr>
+        <p:spPr>
+          <a:xfrm>
+            <a:off x="6858000" y="3364992"/>
+            <a:ext cx="1554480" cy="475488"/>
+          </a:xfrm>
+          <a:prstGeom prst="rect">
+            <a:avLst>
+              <a:gd name="adj" fmla="val 9615"/>
+            </a:avLst>
+          </a:prstGeom>
+          <a:solidFill>
+            <a:srgbClr val="FFFFFF"/>
+          </a:solidFill>
+          <a:ln w="12700">
+            <a:solidFill>
+              <a:srgbClr val="0D9488"/>
+            </a:solidFill>
+            <a:prstDash val="solid"/>
+          </a:ln>
+        </p:spPr>
+      </p:sp>
+      <p:sp>
+        <p:nvSpPr>
+          <p:cNvPr id="35" name="Text 33"/>
+          <p:cNvSpPr/>
+          <p:nvPr/>
+        </p:nvSpPr>
+        <p:spPr>
+          <a:xfrm>
+            <a:off x="6858000" y="3364992"/>
+            <a:ext cx="1554480" cy="475488"/>
+          </a:xfrm>
+          <a:prstGeom prst="rect">
+            <a:avLst/>
+          </a:prstGeom>
+          <a:noFill/>
+          <a:ln/>
+        </p:spPr>
+        <p:txBody>
+          <a:bodyPr wrap="square" lIns="0" tIns="0" rIns="0" bIns="0" rtlCol="0" anchor="ctr"/>
+          <a:lstStyle/>
+          <a:p>
+            <a:pPr algn="ctr" indent="0" marL="0">
+              <a:buNone/>
+            </a:pPr>
+            <a:r>
+              <a:rPr lang="en-US" sz="1400" b="1" dirty="0">
+                <a:solidFill>
+                  <a:srgbClr val="0D9488"/>
+                </a:solidFill>
+                <a:latin typeface="Trebuchet MS" pitchFamily="34" charset="0"/>
+                <a:ea typeface="Trebuchet MS" pitchFamily="34" charset="-122"/>
+                <a:cs typeface="Trebuchet MS" pitchFamily="34" charset="-120"/>
+              </a:rPr>
+              <a:t>ket</a:t>
+            </a:r>
+            <a:endParaRPr lang="en-US" sz="1400" dirty="0"/>
+          </a:p>
+        </p:txBody>
+      </p:sp>
+      <p:sp>
+        <p:nvSpPr>
+          <p:cNvPr id="36" name="Shape 34"/>
           <p:cNvSpPr/>
           <p:nvPr/>
         </p:nvSpPr>
@@ -9361,7 +9466,7 @@
       </p:sp>
       <p:sp>
         <p:nvSpPr>
-          <p:cNvPr id="34" name="Text 32"/>
+          <p:cNvPr id="37" name="Text 35"/>
           <p:cNvSpPr/>
           <p:nvPr/>
         </p:nvSpPr>
@@ -9400,7 +9505,7 @@
       </p:sp>
       <p:sp>
         <p:nvSpPr>
-          <p:cNvPr id="35" name="Shape 33"/>
+          <p:cNvPr id="38" name="Shape 36"/>
           <p:cNvSpPr/>
           <p:nvPr/>
         </p:nvSpPr>
@@ -9427,7 +9532,7 @@
       </p:sp>
       <p:sp>
         <p:nvSpPr>
-          <p:cNvPr id="36" name="Text 34"/>
+          <p:cNvPr id="39" name="Text 37"/>
           <p:cNvSpPr/>
           <p:nvPr/>
         </p:nvSpPr>
@@ -9889,7 +9994,7 @@
                 <a:ea typeface="Trebuchet MS" pitchFamily="34" charset="-122"/>
                 <a:cs typeface="Trebuchet MS" pitchFamily="34" charset="-120"/>
               </a:rPr>
-              <a:t>marketer</a:t>
+              <a:t>supermarket</a:t>
             </a:r>
             <a:endParaRPr lang="en-US" sz="2800" dirty="0"/>
           </a:p>
@@ -9978,11 +10083,11 @@
             </a:avLst>
           </a:prstGeom>
           <a:solidFill>
-            <a:srgbClr val="CCFBF1"/>
+            <a:srgbClr val="DDD6FE"/>
           </a:solidFill>
           <a:ln w="19050">
             <a:solidFill>
-              <a:srgbClr val="0D9488"/>
+              <a:srgbClr val="7C3AED"/>
             </a:solidFill>
             <a:prstDash val="solid"/>
           </a:ln>
@@ -10022,13 +10127,13 @@
             <a:r>
               <a:rPr lang="en-US" sz="1300" b="1" dirty="0">
                 <a:solidFill>
-                  <a:srgbClr val="0F766E"/>
+                  <a:srgbClr val="4C1D95"/>
                 </a:solidFill>
                 <a:latin typeface="Trebuchet MS" pitchFamily="34" charset="0"/>
                 <a:ea typeface="Trebuchet MS" pitchFamily="34" charset="-122"/>
                 <a:cs typeface="Trebuchet MS" pitchFamily="34" charset="-120"/>
               </a:rPr>
-              <a:t>market</a:t>
+              <a:t>super</a:t>
             </a:r>
             <a:endParaRPr lang="en-US" sz="1300" dirty="0"/>
           </a:p>
@@ -10067,7 +10172,7 @@
                 <a:ea typeface="Calibri" pitchFamily="34" charset="-122"/>
                 <a:cs typeface="Calibri" pitchFamily="34" charset="-120"/>
               </a:rPr>
-              <a:t>place to buy and sell</a:t>
+              <a:t>above, beyond, larger</a:t>
             </a:r>
             <a:endParaRPr lang="en-US" sz="850" dirty="0"/>
           </a:p>
@@ -10090,11 +10195,11 @@
             </a:avLst>
           </a:prstGeom>
           <a:solidFill>
-            <a:srgbClr val="FCE7F3"/>
+            <a:srgbClr val="CCFBF1"/>
           </a:solidFill>
           <a:ln w="19050">
             <a:solidFill>
-              <a:srgbClr val="DB2777"/>
+              <a:srgbClr val="0D9488"/>
             </a:solidFill>
             <a:prstDash val="solid"/>
           </a:ln>
@@ -10134,13 +10239,13 @@
             <a:r>
               <a:rPr lang="en-US" sz="1300" b="1" dirty="0">
                 <a:solidFill>
-                  <a:srgbClr val="9D174D"/>
+                  <a:srgbClr val="0F766E"/>
                 </a:solidFill>
                 <a:latin typeface="Trebuchet MS" pitchFamily="34" charset="0"/>
                 <a:ea typeface="Trebuchet MS" pitchFamily="34" charset="-122"/>
                 <a:cs typeface="Trebuchet MS" pitchFamily="34" charset="-120"/>
               </a:rPr>
-              <a:t>er</a:t>
+              <a:t>market</a:t>
             </a:r>
             <a:endParaRPr lang="en-US" sz="1300" dirty="0"/>
           </a:p>
@@ -10179,7 +10284,7 @@
                 <a:ea typeface="Calibri" pitchFamily="34" charset="-122"/>
                 <a:cs typeface="Calibri" pitchFamily="34" charset="-120"/>
               </a:rPr>
-              <a:t>a person who does something</a:t>
+              <a:t>place to buy and sell</a:t>
             </a:r>
             <a:endParaRPr lang="en-US" sz="850" dirty="0"/>
           </a:p>
@@ -10286,8 +10391,8 @@
         </p:nvSpPr>
         <p:spPr>
           <a:xfrm>
-            <a:off x="2313432" y="3364992"/>
-            <a:ext cx="1645920" cy="475488"/>
+            <a:off x="1975104" y="3364992"/>
+            <a:ext cx="1554480" cy="475488"/>
           </a:xfrm>
           <a:prstGeom prst="rect">
             <a:avLst>
@@ -10313,8 +10418,8 @@
         </p:nvSpPr>
         <p:spPr>
           <a:xfrm>
-            <a:off x="2313432" y="3364992"/>
-            <a:ext cx="1645920" cy="475488"/>
+            <a:off x="1975104" y="3364992"/>
+            <a:ext cx="1554480" cy="475488"/>
           </a:xfrm>
           <a:prstGeom prst="rect">
             <a:avLst/>
@@ -10338,7 +10443,7 @@
                 <a:ea typeface="Trebuchet MS" pitchFamily="34" charset="-122"/>
                 <a:cs typeface="Trebuchet MS" pitchFamily="34" charset="-120"/>
               </a:rPr>
-              <a:t>mar</a:t>
+              <a:t>su</a:t>
             </a:r>
             <a:endParaRPr lang="en-US" sz="1400" dirty="0"/>
           </a:p>
@@ -10352,8 +10457,8 @@
         </p:nvSpPr>
         <p:spPr>
           <a:xfrm>
-            <a:off x="3959352" y="3364992"/>
-            <a:ext cx="411480" cy="475488"/>
+            <a:off x="3529584" y="3364992"/>
+            <a:ext cx="73152" cy="475488"/>
           </a:xfrm>
           <a:prstGeom prst="rect">
             <a:avLst/>
@@ -10391,8 +10496,8 @@
         </p:nvSpPr>
         <p:spPr>
           <a:xfrm>
-            <a:off x="4370832" y="3364992"/>
-            <a:ext cx="1645920" cy="475488"/>
+            <a:off x="3602736" y="3364992"/>
+            <a:ext cx="1554480" cy="475488"/>
           </a:xfrm>
           <a:prstGeom prst="rect">
             <a:avLst>
@@ -10418,8 +10523,8 @@
         </p:nvSpPr>
         <p:spPr>
           <a:xfrm>
-            <a:off x="4370832" y="3364992"/>
-            <a:ext cx="1645920" cy="475488"/>
+            <a:off x="3602736" y="3364992"/>
+            <a:ext cx="1554480" cy="475488"/>
           </a:xfrm>
           <a:prstGeom prst="rect">
             <a:avLst/>
@@ -10443,7 +10548,7 @@
                 <a:ea typeface="Trebuchet MS" pitchFamily="34" charset="-122"/>
                 <a:cs typeface="Trebuchet MS" pitchFamily="34" charset="-120"/>
               </a:rPr>
-              <a:t>ket</a:t>
+              <a:t>per</a:t>
             </a:r>
             <a:endParaRPr lang="en-US" sz="1400" dirty="0"/>
           </a:p>
@@ -10457,8 +10562,8 @@
         </p:nvSpPr>
         <p:spPr>
           <a:xfrm>
-            <a:off x="6016752" y="3364992"/>
-            <a:ext cx="411480" cy="475488"/>
+            <a:off x="5157216" y="3364992"/>
+            <a:ext cx="73152" cy="475488"/>
           </a:xfrm>
           <a:prstGeom prst="rect">
             <a:avLst/>
@@ -10496,8 +10601,8 @@
         </p:nvSpPr>
         <p:spPr>
           <a:xfrm>
-            <a:off x="6428232" y="3364992"/>
-            <a:ext cx="1645920" cy="475488"/>
+            <a:off x="5230368" y="3364992"/>
+            <a:ext cx="1554480" cy="475488"/>
           </a:xfrm>
           <a:prstGeom prst="rect">
             <a:avLst>
@@ -10523,8 +10628,8 @@
         </p:nvSpPr>
         <p:spPr>
           <a:xfrm>
-            <a:off x="6428232" y="3364992"/>
-            <a:ext cx="1645920" cy="475488"/>
+            <a:off x="5230368" y="3364992"/>
+            <a:ext cx="1554480" cy="475488"/>
           </a:xfrm>
           <a:prstGeom prst="rect">
             <a:avLst/>
@@ -10548,7 +10653,7 @@
                 <a:ea typeface="Trebuchet MS" pitchFamily="34" charset="-122"/>
                 <a:cs typeface="Trebuchet MS" pitchFamily="34" charset="-120"/>
               </a:rPr>
-              <a:t>er</a:t>
+              <a:t>mar</a:t>
             </a:r>
             <a:endParaRPr lang="en-US" sz="1400" dirty="0"/>
           </a:p>
@@ -10556,7 +10661,112 @@
       </p:sp>
       <p:sp>
         <p:nvSpPr>
-          <p:cNvPr id="33" name="Shape 31"/>
+          <p:cNvPr id="33" name="Text 31"/>
+          <p:cNvSpPr/>
+          <p:nvPr/>
+        </p:nvSpPr>
+        <p:spPr>
+          <a:xfrm>
+            <a:off x="6784848" y="3364992"/>
+            <a:ext cx="73152" cy="475488"/>
+          </a:xfrm>
+          <a:prstGeom prst="rect">
+            <a:avLst/>
+          </a:prstGeom>
+          <a:noFill/>
+          <a:ln/>
+        </p:spPr>
+        <p:txBody>
+          <a:bodyPr wrap="square" lIns="0" tIns="0" rIns="0" bIns="0" rtlCol="0" anchor="ctr"/>
+          <a:lstStyle/>
+          <a:p>
+            <a:pPr algn="ctr" indent="0" marL="0">
+              <a:buNone/>
+            </a:pPr>
+            <a:r>
+              <a:rPr lang="en-US" sz="1600" b="1" dirty="0">
+                <a:solidFill>
+                  <a:srgbClr val="0D9488"/>
+                </a:solidFill>
+                <a:latin typeface="Trebuchet MS" pitchFamily="34" charset="0"/>
+                <a:ea typeface="Trebuchet MS" pitchFamily="34" charset="-122"/>
+                <a:cs typeface="Trebuchet MS" pitchFamily="34" charset="-120"/>
+              </a:rPr>
+              <a:t>·</a:t>
+            </a:r>
+            <a:endParaRPr lang="en-US" sz="1600" dirty="0"/>
+          </a:p>
+        </p:txBody>
+      </p:sp>
+      <p:sp>
+        <p:nvSpPr>
+          <p:cNvPr id="34" name="Shape 32"/>
+          <p:cNvSpPr/>
+          <p:nvPr/>
+        </p:nvSpPr>
+        <p:spPr>
+          <a:xfrm>
+            <a:off x="6858000" y="3364992"/>
+            <a:ext cx="1554480" cy="475488"/>
+          </a:xfrm>
+          <a:prstGeom prst="rect">
+            <a:avLst>
+              <a:gd name="adj" fmla="val 9615"/>
+            </a:avLst>
+          </a:prstGeom>
+          <a:solidFill>
+            <a:srgbClr val="FFFFFF"/>
+          </a:solidFill>
+          <a:ln w="12700">
+            <a:solidFill>
+              <a:srgbClr val="0D9488"/>
+            </a:solidFill>
+            <a:prstDash val="solid"/>
+          </a:ln>
+        </p:spPr>
+      </p:sp>
+      <p:sp>
+        <p:nvSpPr>
+          <p:cNvPr id="35" name="Text 33"/>
+          <p:cNvSpPr/>
+          <p:nvPr/>
+        </p:nvSpPr>
+        <p:spPr>
+          <a:xfrm>
+            <a:off x="6858000" y="3364992"/>
+            <a:ext cx="1554480" cy="475488"/>
+          </a:xfrm>
+          <a:prstGeom prst="rect">
+            <a:avLst/>
+          </a:prstGeom>
+          <a:noFill/>
+          <a:ln/>
+        </p:spPr>
+        <p:txBody>
+          <a:bodyPr wrap="square" lIns="0" tIns="0" rIns="0" bIns="0" rtlCol="0" anchor="ctr"/>
+          <a:lstStyle/>
+          <a:p>
+            <a:pPr algn="ctr" indent="0" marL="0">
+              <a:buNone/>
+            </a:pPr>
+            <a:r>
+              <a:rPr lang="en-US" sz="1400" b="1" dirty="0">
+                <a:solidFill>
+                  <a:srgbClr val="0D9488"/>
+                </a:solidFill>
+                <a:latin typeface="Trebuchet MS" pitchFamily="34" charset="0"/>
+                <a:ea typeface="Trebuchet MS" pitchFamily="34" charset="-122"/>
+                <a:cs typeface="Trebuchet MS" pitchFamily="34" charset="-120"/>
+              </a:rPr>
+              <a:t>ket</a:t>
+            </a:r>
+            <a:endParaRPr lang="en-US" sz="1400" dirty="0"/>
+          </a:p>
+        </p:txBody>
+      </p:sp>
+      <p:sp>
+        <p:nvSpPr>
+          <p:cNvPr id="36" name="Shape 34"/>
           <p:cNvSpPr/>
           <p:nvPr/>
         </p:nvSpPr>
@@ -10583,7 +10793,7 @@
       </p:sp>
       <p:sp>
         <p:nvSpPr>
-          <p:cNvPr id="34" name="Text 32"/>
+          <p:cNvPr id="37" name="Text 35"/>
           <p:cNvSpPr/>
           <p:nvPr/>
         </p:nvSpPr>
@@ -10622,7 +10832,7 @@
       </p:sp>
       <p:sp>
         <p:nvSpPr>
-          <p:cNvPr id="35" name="Shape 33"/>
+          <p:cNvPr id="38" name="Shape 36"/>
           <p:cNvSpPr/>
           <p:nvPr/>
         </p:nvSpPr>
@@ -10649,14 +10859,14 @@
       </p:sp>
       <p:sp>
         <p:nvSpPr>
-          <p:cNvPr id="36" name="Shape 34"/>
-          <p:cNvSpPr/>
-          <p:nvPr/>
-        </p:nvSpPr>
-        <p:spPr>
-          <a:xfrm>
-            <a:off x="2254649" y="4169664"/>
-            <a:ext cx="685800" cy="475488"/>
+          <p:cNvPr id="39" name="Shape 37"/>
+          <p:cNvSpPr/>
+          <p:nvPr/>
+        </p:nvSpPr>
+        <p:spPr>
+          <a:xfrm>
+            <a:off x="1951330" y="4169664"/>
+            <a:ext cx="676656" cy="475488"/>
           </a:xfrm>
           <a:prstGeom prst="rect">
             <a:avLst>
@@ -10676,14 +10886,14 @@
       </p:sp>
       <p:sp>
         <p:nvSpPr>
-          <p:cNvPr id="37" name="Text 35"/>
-          <p:cNvSpPr/>
-          <p:nvPr/>
-        </p:nvSpPr>
-        <p:spPr>
-          <a:xfrm>
-            <a:off x="2254649" y="4169664"/>
-            <a:ext cx="685800" cy="475488"/>
+          <p:cNvPr id="40" name="Text 38"/>
+          <p:cNvSpPr/>
+          <p:nvPr/>
+        </p:nvSpPr>
+        <p:spPr>
+          <a:xfrm>
+            <a:off x="1951330" y="4169664"/>
+            <a:ext cx="676656" cy="475488"/>
           </a:xfrm>
           <a:prstGeom prst="rect">
             <a:avLst/>
@@ -10707,7 +10917,7 @@
                 <a:ea typeface="Trebuchet MS" pitchFamily="34" charset="-122"/>
                 <a:cs typeface="Trebuchet MS" pitchFamily="34" charset="-120"/>
               </a:rPr>
-              <a:t>m</a:t>
+              <a:t>s</a:t>
             </a:r>
             <a:endParaRPr lang="en-US" sz="900" dirty="0"/>
           </a:p>
@@ -10715,14 +10925,14 @@
       </p:sp>
       <p:sp>
         <p:nvSpPr>
-          <p:cNvPr id="38" name="Shape 36"/>
-          <p:cNvSpPr/>
-          <p:nvPr/>
-        </p:nvSpPr>
-        <p:spPr>
-          <a:xfrm>
-            <a:off x="3293146" y="4169664"/>
-            <a:ext cx="685800" cy="475488"/>
+          <p:cNvPr id="41" name="Shape 39"/>
+          <p:cNvSpPr/>
+          <p:nvPr/>
+        </p:nvSpPr>
+        <p:spPr>
+          <a:xfrm>
+            <a:off x="2677363" y="4169664"/>
+            <a:ext cx="676656" cy="475488"/>
           </a:xfrm>
           <a:prstGeom prst="rect">
             <a:avLst>
@@ -10742,14 +10952,14 @@
       </p:sp>
       <p:sp>
         <p:nvSpPr>
-          <p:cNvPr id="39" name="Text 37"/>
-          <p:cNvSpPr/>
-          <p:nvPr/>
-        </p:nvSpPr>
-        <p:spPr>
-          <a:xfrm>
-            <a:off x="3293146" y="4169664"/>
-            <a:ext cx="685800" cy="475488"/>
+          <p:cNvPr id="42" name="Text 40"/>
+          <p:cNvSpPr/>
+          <p:nvPr/>
+        </p:nvSpPr>
+        <p:spPr>
+          <a:xfrm>
+            <a:off x="2677363" y="4169664"/>
+            <a:ext cx="676656" cy="475488"/>
           </a:xfrm>
           <a:prstGeom prst="rect">
             <a:avLst/>
@@ -10773,7 +10983,7 @@
                 <a:ea typeface="Trebuchet MS" pitchFamily="34" charset="-122"/>
                 <a:cs typeface="Trebuchet MS" pitchFamily="34" charset="-120"/>
               </a:rPr>
-              <a:t>ar</a:t>
+              <a:t>u</a:t>
             </a:r>
             <a:endParaRPr lang="en-US" sz="900" dirty="0"/>
           </a:p>
@@ -10781,14 +10991,14 @@
       </p:sp>
       <p:sp>
         <p:nvSpPr>
-          <p:cNvPr id="40" name="Shape 38"/>
-          <p:cNvSpPr/>
-          <p:nvPr/>
-        </p:nvSpPr>
-        <p:spPr>
-          <a:xfrm>
-            <a:off x="4331643" y="4169664"/>
-            <a:ext cx="685800" cy="475488"/>
+          <p:cNvPr id="43" name="Shape 41"/>
+          <p:cNvSpPr/>
+          <p:nvPr/>
+        </p:nvSpPr>
+        <p:spPr>
+          <a:xfrm>
+            <a:off x="3403397" y="4169664"/>
+            <a:ext cx="676656" cy="475488"/>
           </a:xfrm>
           <a:prstGeom prst="rect">
             <a:avLst>
@@ -10808,14 +11018,14 @@
       </p:sp>
       <p:sp>
         <p:nvSpPr>
-          <p:cNvPr id="41" name="Text 39"/>
-          <p:cNvSpPr/>
-          <p:nvPr/>
-        </p:nvSpPr>
-        <p:spPr>
-          <a:xfrm>
-            <a:off x="4331643" y="4169664"/>
-            <a:ext cx="685800" cy="475488"/>
+          <p:cNvPr id="44" name="Text 42"/>
+          <p:cNvSpPr/>
+          <p:nvPr/>
+        </p:nvSpPr>
+        <p:spPr>
+          <a:xfrm>
+            <a:off x="3403397" y="4169664"/>
+            <a:ext cx="676656" cy="475488"/>
           </a:xfrm>
           <a:prstGeom prst="rect">
             <a:avLst/>
@@ -10839,7 +11049,7 @@
                 <a:ea typeface="Trebuchet MS" pitchFamily="34" charset="-122"/>
                 <a:cs typeface="Trebuchet MS" pitchFamily="34" charset="-120"/>
               </a:rPr>
-              <a:t>k</a:t>
+              <a:t>p</a:t>
             </a:r>
             <a:endParaRPr lang="en-US" sz="900" dirty="0"/>
           </a:p>
@@ -10847,14 +11057,14 @@
       </p:sp>
       <p:sp>
         <p:nvSpPr>
-          <p:cNvPr id="42" name="Shape 40"/>
-          <p:cNvSpPr/>
-          <p:nvPr/>
-        </p:nvSpPr>
-        <p:spPr>
-          <a:xfrm>
-            <a:off x="5370141" y="4169664"/>
-            <a:ext cx="685800" cy="475488"/>
+          <p:cNvPr id="45" name="Shape 43"/>
+          <p:cNvSpPr/>
+          <p:nvPr/>
+        </p:nvSpPr>
+        <p:spPr>
+          <a:xfrm>
+            <a:off x="4129430" y="4169664"/>
+            <a:ext cx="676656" cy="475488"/>
           </a:xfrm>
           <a:prstGeom prst="rect">
             <a:avLst>
@@ -10874,14 +11084,14 @@
       </p:sp>
       <p:sp>
         <p:nvSpPr>
-          <p:cNvPr id="43" name="Text 41"/>
-          <p:cNvSpPr/>
-          <p:nvPr/>
-        </p:nvSpPr>
-        <p:spPr>
-          <a:xfrm>
-            <a:off x="5370141" y="4169664"/>
-            <a:ext cx="685800" cy="475488"/>
+          <p:cNvPr id="46" name="Text 44"/>
+          <p:cNvSpPr/>
+          <p:nvPr/>
+        </p:nvSpPr>
+        <p:spPr>
+          <a:xfrm>
+            <a:off x="4129430" y="4169664"/>
+            <a:ext cx="676656" cy="475488"/>
           </a:xfrm>
           <a:prstGeom prst="rect">
             <a:avLst/>
@@ -10905,7 +11115,7 @@
                 <a:ea typeface="Trebuchet MS" pitchFamily="34" charset="-122"/>
                 <a:cs typeface="Trebuchet MS" pitchFamily="34" charset="-120"/>
               </a:rPr>
-              <a:t>e</a:t>
+              <a:t>er</a:t>
             </a:r>
             <a:endParaRPr lang="en-US" sz="900" dirty="0"/>
           </a:p>
@@ -10913,14 +11123,14 @@
       </p:sp>
       <p:sp>
         <p:nvSpPr>
-          <p:cNvPr id="44" name="Shape 42"/>
-          <p:cNvSpPr/>
-          <p:nvPr/>
-        </p:nvSpPr>
-        <p:spPr>
-          <a:xfrm>
-            <a:off x="6408638" y="4169664"/>
-            <a:ext cx="685800" cy="475488"/>
+          <p:cNvPr id="47" name="Shape 45"/>
+          <p:cNvSpPr/>
+          <p:nvPr/>
+        </p:nvSpPr>
+        <p:spPr>
+          <a:xfrm>
+            <a:off x="4855464" y="4169664"/>
+            <a:ext cx="676656" cy="475488"/>
           </a:xfrm>
           <a:prstGeom prst="rect">
             <a:avLst>
@@ -10940,14 +11150,14 @@
       </p:sp>
       <p:sp>
         <p:nvSpPr>
-          <p:cNvPr id="45" name="Text 43"/>
-          <p:cNvSpPr/>
-          <p:nvPr/>
-        </p:nvSpPr>
-        <p:spPr>
-          <a:xfrm>
-            <a:off x="6408638" y="4169664"/>
-            <a:ext cx="685800" cy="475488"/>
+          <p:cNvPr id="48" name="Text 46"/>
+          <p:cNvSpPr/>
+          <p:nvPr/>
+        </p:nvSpPr>
+        <p:spPr>
+          <a:xfrm>
+            <a:off x="4855464" y="4169664"/>
+            <a:ext cx="676656" cy="475488"/>
           </a:xfrm>
           <a:prstGeom prst="rect">
             <a:avLst/>
@@ -10971,7 +11181,7 @@
                 <a:ea typeface="Trebuchet MS" pitchFamily="34" charset="-122"/>
                 <a:cs typeface="Trebuchet MS" pitchFamily="34" charset="-120"/>
               </a:rPr>
-              <a:t>t</a:t>
+              <a:t>m</a:t>
             </a:r>
             <a:endParaRPr lang="en-US" sz="900" dirty="0"/>
           </a:p>
@@ -10979,14 +11189,14 @@
       </p:sp>
       <p:sp>
         <p:nvSpPr>
-          <p:cNvPr id="46" name="Shape 44"/>
-          <p:cNvSpPr/>
-          <p:nvPr/>
-        </p:nvSpPr>
-        <p:spPr>
-          <a:xfrm>
-            <a:off x="7447135" y="4169664"/>
-            <a:ext cx="685800" cy="475488"/>
+          <p:cNvPr id="49" name="Shape 47"/>
+          <p:cNvSpPr/>
+          <p:nvPr/>
+        </p:nvSpPr>
+        <p:spPr>
+          <a:xfrm>
+            <a:off x="5581498" y="4169664"/>
+            <a:ext cx="676656" cy="475488"/>
           </a:xfrm>
           <a:prstGeom prst="rect">
             <a:avLst>
@@ -11006,14 +11216,14 @@
       </p:sp>
       <p:sp>
         <p:nvSpPr>
-          <p:cNvPr id="47" name="Text 45"/>
-          <p:cNvSpPr/>
-          <p:nvPr/>
-        </p:nvSpPr>
-        <p:spPr>
-          <a:xfrm>
-            <a:off x="7447135" y="4169664"/>
-            <a:ext cx="685800" cy="475488"/>
+          <p:cNvPr id="50" name="Text 48"/>
+          <p:cNvSpPr/>
+          <p:nvPr/>
+        </p:nvSpPr>
+        <p:spPr>
+          <a:xfrm>
+            <a:off x="5581498" y="4169664"/>
+            <a:ext cx="676656" cy="475488"/>
           </a:xfrm>
           <a:prstGeom prst="rect">
             <a:avLst/>
@@ -11037,7 +11247,205 @@
                 <a:ea typeface="Trebuchet MS" pitchFamily="34" charset="-122"/>
                 <a:cs typeface="Trebuchet MS" pitchFamily="34" charset="-120"/>
               </a:rPr>
-              <a:t>er</a:t>
+              <a:t>ar</a:t>
+            </a:r>
+            <a:endParaRPr lang="en-US" sz="900" dirty="0"/>
+          </a:p>
+        </p:txBody>
+      </p:sp>
+      <p:sp>
+        <p:nvSpPr>
+          <p:cNvPr id="51" name="Shape 49"/>
+          <p:cNvSpPr/>
+          <p:nvPr/>
+        </p:nvSpPr>
+        <p:spPr>
+          <a:xfrm>
+            <a:off x="6307531" y="4169664"/>
+            <a:ext cx="676656" cy="475488"/>
+          </a:xfrm>
+          <a:prstGeom prst="rect">
+            <a:avLst>
+              <a:gd name="adj" fmla="val 7692"/>
+            </a:avLst>
+          </a:prstGeom>
+          <a:solidFill>
+            <a:srgbClr val="FFFFFF"/>
+          </a:solidFill>
+          <a:ln w="12700">
+            <a:solidFill>
+              <a:srgbClr val="DB2777"/>
+            </a:solidFill>
+            <a:prstDash val="solid"/>
+          </a:ln>
+        </p:spPr>
+      </p:sp>
+      <p:sp>
+        <p:nvSpPr>
+          <p:cNvPr id="52" name="Text 50"/>
+          <p:cNvSpPr/>
+          <p:nvPr/>
+        </p:nvSpPr>
+        <p:spPr>
+          <a:xfrm>
+            <a:off x="6307531" y="4169664"/>
+            <a:ext cx="676656" cy="475488"/>
+          </a:xfrm>
+          <a:prstGeom prst="rect">
+            <a:avLst/>
+          </a:prstGeom>
+          <a:noFill/>
+          <a:ln/>
+        </p:spPr>
+        <p:txBody>
+          <a:bodyPr wrap="square" lIns="0" tIns="0" rIns="0" bIns="0" rtlCol="0" anchor="ctr"/>
+          <a:lstStyle/>
+          <a:p>
+            <a:pPr algn="ctr" indent="0" marL="0">
+              <a:buNone/>
+            </a:pPr>
+            <a:r>
+              <a:rPr lang="en-US" sz="900" b="1" dirty="0">
+                <a:solidFill>
+                  <a:srgbClr val="9D174D"/>
+                </a:solidFill>
+                <a:latin typeface="Trebuchet MS" pitchFamily="34" charset="0"/>
+                <a:ea typeface="Trebuchet MS" pitchFamily="34" charset="-122"/>
+                <a:cs typeface="Trebuchet MS" pitchFamily="34" charset="-120"/>
+              </a:rPr>
+              <a:t>k</a:t>
+            </a:r>
+            <a:endParaRPr lang="en-US" sz="900" dirty="0"/>
+          </a:p>
+        </p:txBody>
+      </p:sp>
+      <p:sp>
+        <p:nvSpPr>
+          <p:cNvPr id="53" name="Shape 51"/>
+          <p:cNvSpPr/>
+          <p:nvPr/>
+        </p:nvSpPr>
+        <p:spPr>
+          <a:xfrm>
+            <a:off x="7033565" y="4169664"/>
+            <a:ext cx="676656" cy="475488"/>
+          </a:xfrm>
+          <a:prstGeom prst="rect">
+            <a:avLst>
+              <a:gd name="adj" fmla="val 7692"/>
+            </a:avLst>
+          </a:prstGeom>
+          <a:solidFill>
+            <a:srgbClr val="FFFFFF"/>
+          </a:solidFill>
+          <a:ln w="12700">
+            <a:solidFill>
+              <a:srgbClr val="DB2777"/>
+            </a:solidFill>
+            <a:prstDash val="solid"/>
+          </a:ln>
+        </p:spPr>
+      </p:sp>
+      <p:sp>
+        <p:nvSpPr>
+          <p:cNvPr id="54" name="Text 52"/>
+          <p:cNvSpPr/>
+          <p:nvPr/>
+        </p:nvSpPr>
+        <p:spPr>
+          <a:xfrm>
+            <a:off x="7033565" y="4169664"/>
+            <a:ext cx="676656" cy="475488"/>
+          </a:xfrm>
+          <a:prstGeom prst="rect">
+            <a:avLst/>
+          </a:prstGeom>
+          <a:noFill/>
+          <a:ln/>
+        </p:spPr>
+        <p:txBody>
+          <a:bodyPr wrap="square" lIns="0" tIns="0" rIns="0" bIns="0" rtlCol="0" anchor="ctr"/>
+          <a:lstStyle/>
+          <a:p>
+            <a:pPr algn="ctr" indent="0" marL="0">
+              <a:buNone/>
+            </a:pPr>
+            <a:r>
+              <a:rPr lang="en-US" sz="900" b="1" dirty="0">
+                <a:solidFill>
+                  <a:srgbClr val="9D174D"/>
+                </a:solidFill>
+                <a:latin typeface="Trebuchet MS" pitchFamily="34" charset="0"/>
+                <a:ea typeface="Trebuchet MS" pitchFamily="34" charset="-122"/>
+                <a:cs typeface="Trebuchet MS" pitchFamily="34" charset="-120"/>
+              </a:rPr>
+              <a:t>e</a:t>
+            </a:r>
+            <a:endParaRPr lang="en-US" sz="900" dirty="0"/>
+          </a:p>
+        </p:txBody>
+      </p:sp>
+      <p:sp>
+        <p:nvSpPr>
+          <p:cNvPr id="55" name="Shape 53"/>
+          <p:cNvSpPr/>
+          <p:nvPr/>
+        </p:nvSpPr>
+        <p:spPr>
+          <a:xfrm>
+            <a:off x="7759598" y="4169664"/>
+            <a:ext cx="676656" cy="475488"/>
+          </a:xfrm>
+          <a:prstGeom prst="rect">
+            <a:avLst>
+              <a:gd name="adj" fmla="val 7692"/>
+            </a:avLst>
+          </a:prstGeom>
+          <a:solidFill>
+            <a:srgbClr val="FFFFFF"/>
+          </a:solidFill>
+          <a:ln w="12700">
+            <a:solidFill>
+              <a:srgbClr val="DB2777"/>
+            </a:solidFill>
+            <a:prstDash val="solid"/>
+          </a:ln>
+        </p:spPr>
+      </p:sp>
+      <p:sp>
+        <p:nvSpPr>
+          <p:cNvPr id="56" name="Text 54"/>
+          <p:cNvSpPr/>
+          <p:nvPr/>
+        </p:nvSpPr>
+        <p:spPr>
+          <a:xfrm>
+            <a:off x="7759598" y="4169664"/>
+            <a:ext cx="676656" cy="475488"/>
+          </a:xfrm>
+          <a:prstGeom prst="rect">
+            <a:avLst/>
+          </a:prstGeom>
+          <a:noFill/>
+          <a:ln/>
+        </p:spPr>
+        <p:txBody>
+          <a:bodyPr wrap="square" lIns="0" tIns="0" rIns="0" bIns="0" rtlCol="0" anchor="ctr"/>
+          <a:lstStyle/>
+          <a:p>
+            <a:pPr algn="ctr" indent="0" marL="0">
+              <a:buNone/>
+            </a:pPr>
+            <a:r>
+              <a:rPr lang="en-US" sz="900" b="1" dirty="0">
+                <a:solidFill>
+                  <a:srgbClr val="9D174D"/>
+                </a:solidFill>
+                <a:latin typeface="Trebuchet MS" pitchFamily="34" charset="0"/>
+                <a:ea typeface="Trebuchet MS" pitchFamily="34" charset="-122"/>
+                <a:cs typeface="Trebuchet MS" pitchFamily="34" charset="-120"/>
+              </a:rPr>
+              <a:t>t</a:t>
             </a:r>
             <a:endParaRPr lang="en-US" sz="900" dirty="0"/>
           </a:p>
@@ -16889,7 +17297,7 @@
                 <a:ea typeface="Trebuchet MS" pitchFamily="34" charset="-122"/>
                 <a:cs typeface="Trebuchet MS" pitchFamily="34" charset="-120"/>
               </a:rPr>
-              <a:t>1</a:t>
+              <a:t>2</a:t>
             </a:r>
             <a:pPr algn="ctr" indent="0" marL="0">
               <a:buNone/>
@@ -16903,7 +17311,7 @@
                 <a:ea typeface="Trebuchet MS" pitchFamily="34" charset="-122"/>
                 <a:cs typeface="Trebuchet MS" pitchFamily="34" charset="-120"/>
               </a:rPr>
-              <a:t>  punctuation mark</a:t>
+              <a:t>  punctuation marks</a:t>
             </a:r>
             <a:endParaRPr lang="en-US" sz="2800" dirty="0"/>
           </a:p>
@@ -17338,7 +17746,7 @@
                 <a:ea typeface="Calibri" pitchFamily="34" charset="-122"/>
                 <a:cs typeface="Calibri" pitchFamily="34" charset="-120"/>
               </a:rPr>
-              <a:t> goods at the </a:t>
+              <a:t> product was sold in the </a:t>
             </a:r>
             <a:pPr algn="l" indent="0" marL="0">
               <a:buNone/>
@@ -17355,7 +17763,7 @@
                 <a:ea typeface="Calibri" pitchFamily="34" charset="-122"/>
                 <a:cs typeface="Calibri" pitchFamily="34" charset="-120"/>
               </a:rPr>
-              <a:t>supermarket</a:t>
+              <a:t>hypermarket</a:t>
             </a:r>
             <a:pPr algn="l" indent="0" marL="0">
               <a:buNone/>
@@ -17369,7 +17777,7 @@
                 <a:ea typeface="Calibri" pitchFamily="34" charset="-122"/>
                 <a:cs typeface="Calibri" pitchFamily="34" charset="-120"/>
               </a:rPr>
-              <a:t> were </a:t>
+              <a:t>, and the </a:t>
             </a:r>
             <a:pPr algn="l" indent="0" marL="0">
               <a:buNone/>
@@ -17386,7 +17794,7 @@
                 <a:ea typeface="Calibri" pitchFamily="34" charset="-122"/>
                 <a:cs typeface="Calibri" pitchFamily="34" charset="-120"/>
               </a:rPr>
-              <a:t>marketed</a:t>
+              <a:t>aftermarket</a:t>
             </a:r>
             <a:pPr algn="l" indent="0" marL="0">
               <a:buNone/>
@@ -17400,7 +17808,7 @@
                 <a:ea typeface="Calibri" pitchFamily="34" charset="-122"/>
                 <a:cs typeface="Calibri" pitchFamily="34" charset="-120"/>
               </a:rPr>
-              <a:t> with bright, colourful signs.</a:t>
+              <a:t> parts were very popular.</a:t>
             </a:r>
             <a:endParaRPr lang="en-US" sz="1800" dirty="0"/>
           </a:p>
@@ -17683,7 +18091,7 @@
                 <a:ea typeface="Trebuchet MS" pitchFamily="34" charset="-122"/>
                 <a:cs typeface="Trebuchet MS" pitchFamily="34" charset="-120"/>
               </a:rPr>
-              <a:t>supermarket</a:t>
+              <a:t>hypermarket</a:t>
             </a:r>
             <a:endParaRPr lang="en-US" sz="1400" dirty="0"/>
           </a:p>
@@ -17811,7 +18219,7 @@
                 <a:ea typeface="Trebuchet MS" pitchFamily="34" charset="-122"/>
                 <a:cs typeface="Trebuchet MS" pitchFamily="34" charset="-120"/>
               </a:rPr>
-              <a:t>marketed</a:t>
+              <a:t>aftermarket</a:t>
             </a:r>
             <a:endParaRPr lang="en-US" sz="1400" dirty="0"/>
           </a:p>
@@ -19398,7 +19806,7 @@
                 <a:ea typeface="Calibri" pitchFamily="34" charset="-122"/>
                 <a:cs typeface="Calibri" pitchFamily="34" charset="-120"/>
               </a:rPr>
-              <a:t>capable of being</a:t>
+              <a:t>able to be, capable of</a:t>
             </a:r>
             <a:endParaRPr lang="en-US" sz="850" dirty="0"/>
           </a:p>
@@ -20383,7 +20791,7 @@
                 <a:ea typeface="Calibri" pitchFamily="34" charset="-122"/>
                 <a:cs typeface="Calibri" pitchFamily="34" charset="-120"/>
               </a:rPr>
-              <a:t>capable of being</a:t>
+              <a:t>able to be, capable of</a:t>
             </a:r>
             <a:endParaRPr lang="en-US" sz="850" dirty="0"/>
           </a:p>
@@ -21710,7 +22118,7 @@
                 <a:ea typeface="Calibri" pitchFamily="34" charset="-122"/>
                 <a:cs typeface="Calibri" pitchFamily="34" charset="-120"/>
               </a:rPr>
-              <a:t>capable of being</a:t>
+              <a:t>able to be, capable of</a:t>
             </a:r>
             <a:endParaRPr lang="en-US" sz="850" dirty="0"/>
           </a:p>
@@ -23236,7 +23644,7 @@
                 <a:ea typeface="Trebuchet MS" pitchFamily="34" charset="-122"/>
                 <a:cs typeface="Trebuchet MS" pitchFamily="34" charset="-120"/>
               </a:rPr>
-              <a:t>supermarket</a:t>
+              <a:t>hypermarket</a:t>
             </a:r>
             <a:endParaRPr lang="en-US" sz="2800" dirty="0"/>
           </a:p>
@@ -24063,7 +24471,7 @@
                 <a:ea typeface="Trebuchet MS" pitchFamily="34" charset="-122"/>
                 <a:cs typeface="Trebuchet MS" pitchFamily="34" charset="-120"/>
               </a:rPr>
-              <a:t>supermarket</a:t>
+              <a:t>hypermarket</a:t>
             </a:r>
             <a:endParaRPr lang="en-US" sz="2800" dirty="0"/>
           </a:p>
@@ -24202,7 +24610,7 @@
                 <a:ea typeface="Trebuchet MS" pitchFamily="34" charset="-122"/>
                 <a:cs typeface="Trebuchet MS" pitchFamily="34" charset="-120"/>
               </a:rPr>
-              <a:t>super</a:t>
+              <a:t>hyper</a:t>
             </a:r>
             <a:endParaRPr lang="en-US" sz="1300" dirty="0"/>
           </a:p>
@@ -24241,7 +24649,7 @@
                 <a:ea typeface="Calibri" pitchFamily="34" charset="-122"/>
                 <a:cs typeface="Calibri" pitchFamily="34" charset="-120"/>
               </a:rPr>
-              <a:t>above or greater</a:t>
+              <a:t>over, beyond, extremely large</a:t>
             </a:r>
             <a:endParaRPr lang="en-US" sz="850" dirty="0"/>
           </a:p>
@@ -25767,7 +26175,7 @@
                 <a:ea typeface="Trebuchet MS" pitchFamily="34" charset="-122"/>
                 <a:cs typeface="Trebuchet MS" pitchFamily="34" charset="-120"/>
               </a:rPr>
-              <a:t>supermarket</a:t>
+              <a:t>hypermarket</a:t>
             </a:r>
             <a:endParaRPr lang="en-US" sz="2800" dirty="0"/>
           </a:p>
@@ -25906,7 +26314,7 @@
                 <a:ea typeface="Trebuchet MS" pitchFamily="34" charset="-122"/>
                 <a:cs typeface="Trebuchet MS" pitchFamily="34" charset="-120"/>
               </a:rPr>
-              <a:t>super</a:t>
+              <a:t>hyper</a:t>
             </a:r>
             <a:endParaRPr lang="en-US" sz="1300" dirty="0"/>
           </a:p>
@@ -25945,7 +26353,7 @@
                 <a:ea typeface="Calibri" pitchFamily="34" charset="-122"/>
                 <a:cs typeface="Calibri" pitchFamily="34" charset="-120"/>
               </a:rPr>
-              <a:t>above or greater</a:t>
+              <a:t>over, beyond, extremely large</a:t>
             </a:r>
             <a:endParaRPr lang="en-US" sz="850" dirty="0"/>
           </a:p>
@@ -26216,7 +26624,7 @@
                 <a:ea typeface="Trebuchet MS" pitchFamily="34" charset="-122"/>
                 <a:cs typeface="Trebuchet MS" pitchFamily="34" charset="-120"/>
               </a:rPr>
-              <a:t>su</a:t>
+              <a:t>hy</a:t>
             </a:r>
             <a:endParaRPr lang="en-US" sz="1400" dirty="0"/>
           </a:p>
@@ -27094,7 +27502,7 @@
                 <a:ea typeface="Trebuchet MS" pitchFamily="34" charset="-122"/>
                 <a:cs typeface="Trebuchet MS" pitchFamily="34" charset="-120"/>
               </a:rPr>
-              <a:t>supermarket</a:t>
+              <a:t>hypermarket</a:t>
             </a:r>
             <a:endParaRPr lang="en-US" sz="2800" dirty="0"/>
           </a:p>
@@ -27233,7 +27641,7 @@
                 <a:ea typeface="Trebuchet MS" pitchFamily="34" charset="-122"/>
                 <a:cs typeface="Trebuchet MS" pitchFamily="34" charset="-120"/>
               </a:rPr>
-              <a:t>super</a:t>
+              <a:t>hyper</a:t>
             </a:r>
             <a:endParaRPr lang="en-US" sz="1300" dirty="0"/>
           </a:p>
@@ -27272,7 +27680,7 @@
                 <a:ea typeface="Calibri" pitchFamily="34" charset="-122"/>
                 <a:cs typeface="Calibri" pitchFamily="34" charset="-120"/>
               </a:rPr>
-              <a:t>above or greater</a:t>
+              <a:t>over, beyond, extremely large</a:t>
             </a:r>
             <a:endParaRPr lang="en-US" sz="850" dirty="0"/>
           </a:p>
@@ -27543,7 +27951,7 @@
                 <a:ea typeface="Trebuchet MS" pitchFamily="34" charset="-122"/>
                 <a:cs typeface="Trebuchet MS" pitchFamily="34" charset="-120"/>
               </a:rPr>
-              <a:t>su</a:t>
+              <a:t>hy</a:t>
             </a:r>
             <a:endParaRPr lang="en-US" sz="1400" dirty="0"/>
           </a:p>
@@ -28017,7 +28425,7 @@
                 <a:ea typeface="Trebuchet MS" pitchFamily="34" charset="-122"/>
                 <a:cs typeface="Trebuchet MS" pitchFamily="34" charset="-120"/>
               </a:rPr>
-              <a:t>s</a:t>
+              <a:t>h</a:t>
             </a:r>
             <a:endParaRPr lang="en-US" sz="900" dirty="0"/>
           </a:p>
@@ -28083,7 +28491,7 @@
                 <a:ea typeface="Trebuchet MS" pitchFamily="34" charset="-122"/>
                 <a:cs typeface="Trebuchet MS" pitchFamily="34" charset="-120"/>
               </a:rPr>
-              <a:t>u</a:t>
+              <a:t>y</a:t>
             </a:r>
             <a:endParaRPr lang="en-US" sz="900" dirty="0"/>
           </a:p>
@@ -28976,7 +29384,7 @@
                 <a:ea typeface="Trebuchet MS" pitchFamily="34" charset="-122"/>
                 <a:cs typeface="Trebuchet MS" pitchFamily="34" charset="-120"/>
               </a:rPr>
-              <a:t>marketed</a:t>
+              <a:t>aftermarket</a:t>
             </a:r>
             <a:endParaRPr lang="en-US" sz="2800" dirty="0"/>
           </a:p>
@@ -29803,7 +30211,7 @@
                 <a:ea typeface="Trebuchet MS" pitchFamily="34" charset="-122"/>
                 <a:cs typeface="Trebuchet MS" pitchFamily="34" charset="-120"/>
               </a:rPr>
-              <a:t>marketed</a:t>
+              <a:t>aftermarket</a:t>
             </a:r>
             <a:endParaRPr lang="en-US" sz="2800" dirty="0"/>
           </a:p>
@@ -29892,11 +30300,11 @@
             </a:avLst>
           </a:prstGeom>
           <a:solidFill>
-            <a:srgbClr val="CCFBF1"/>
+            <a:srgbClr val="DDD6FE"/>
           </a:solidFill>
           <a:ln w="19050">
             <a:solidFill>
-              <a:srgbClr val="0D9488"/>
+              <a:srgbClr val="7C3AED"/>
             </a:solidFill>
             <a:prstDash val="solid"/>
           </a:ln>
@@ -29936,13 +30344,13 @@
             <a:r>
               <a:rPr lang="en-US" sz="1300" b="1" dirty="0">
                 <a:solidFill>
-                  <a:srgbClr val="0F766E"/>
+                  <a:srgbClr val="4C1D95"/>
                 </a:solidFill>
                 <a:latin typeface="Trebuchet MS" pitchFamily="34" charset="0"/>
                 <a:ea typeface="Trebuchet MS" pitchFamily="34" charset="-122"/>
                 <a:cs typeface="Trebuchet MS" pitchFamily="34" charset="-120"/>
               </a:rPr>
-              <a:t>market</a:t>
+              <a:t>after</a:t>
             </a:r>
             <a:endParaRPr lang="en-US" sz="1300" dirty="0"/>
           </a:p>
@@ -29981,7 +30389,7 @@
                 <a:ea typeface="Calibri" pitchFamily="34" charset="-122"/>
                 <a:cs typeface="Calibri" pitchFamily="34" charset="-120"/>
               </a:rPr>
-              <a:t>place to buy and sell</a:t>
+              <a:t>following, later</a:t>
             </a:r>
             <a:endParaRPr lang="en-US" sz="850" dirty="0"/>
           </a:p>
@@ -30004,11 +30412,11 @@
             </a:avLst>
           </a:prstGeom>
           <a:solidFill>
-            <a:srgbClr val="FCE7F3"/>
+            <a:srgbClr val="CCFBF1"/>
           </a:solidFill>
           <a:ln w="19050">
             <a:solidFill>
-              <a:srgbClr val="DB2777"/>
+              <a:srgbClr val="0D9488"/>
             </a:solidFill>
             <a:prstDash val="solid"/>
           </a:ln>
@@ -30048,13 +30456,13 @@
             <a:r>
               <a:rPr lang="en-US" sz="1300" b="1" dirty="0">
                 <a:solidFill>
-                  <a:srgbClr val="9D174D"/>
+                  <a:srgbClr val="0F766E"/>
                 </a:solidFill>
                 <a:latin typeface="Trebuchet MS" pitchFamily="34" charset="0"/>
                 <a:ea typeface="Trebuchet MS" pitchFamily="34" charset="-122"/>
                 <a:cs typeface="Trebuchet MS" pitchFamily="34" charset="-120"/>
               </a:rPr>
-              <a:t>ed</a:t>
+              <a:t>market</a:t>
             </a:r>
             <a:endParaRPr lang="en-US" sz="1300" dirty="0"/>
           </a:p>
@@ -30093,7 +30501,7 @@
                 <a:ea typeface="Calibri" pitchFamily="34" charset="-122"/>
                 <a:cs typeface="Calibri" pitchFamily="34" charset="-120"/>
               </a:rPr>
-              <a:t>happened in the past</a:t>
+              <a:t>place to buy and sell</a:t>
             </a:r>
             <a:endParaRPr lang="en-US" sz="850" dirty="0"/>
           </a:p>
@@ -30788,7 +31196,7 @@
                 <a:ea typeface="Trebuchet MS" pitchFamily="34" charset="-122"/>
                 <a:cs typeface="Trebuchet MS" pitchFamily="34" charset="-120"/>
               </a:rPr>
-              <a:t>marketed</a:t>
+              <a:t>aftermarket</a:t>
             </a:r>
             <a:endParaRPr lang="en-US" sz="2800" dirty="0"/>
           </a:p>
@@ -30877,11 +31285,11 @@
             </a:avLst>
           </a:prstGeom>
           <a:solidFill>
-            <a:srgbClr val="CCFBF1"/>
+            <a:srgbClr val="DDD6FE"/>
           </a:solidFill>
           <a:ln w="19050">
             <a:solidFill>
-              <a:srgbClr val="0D9488"/>
+              <a:srgbClr val="7C3AED"/>
             </a:solidFill>
             <a:prstDash val="solid"/>
           </a:ln>
@@ -30921,13 +31329,13 @@
             <a:r>
               <a:rPr lang="en-US" sz="1300" b="1" dirty="0">
                 <a:solidFill>
-                  <a:srgbClr val="0F766E"/>
+                  <a:srgbClr val="4C1D95"/>
                 </a:solidFill>
                 <a:latin typeface="Trebuchet MS" pitchFamily="34" charset="0"/>
                 <a:ea typeface="Trebuchet MS" pitchFamily="34" charset="-122"/>
                 <a:cs typeface="Trebuchet MS" pitchFamily="34" charset="-120"/>
               </a:rPr>
-              <a:t>market</a:t>
+              <a:t>after</a:t>
             </a:r>
             <a:endParaRPr lang="en-US" sz="1300" dirty="0"/>
           </a:p>
@@ -30966,7 +31374,7 @@
                 <a:ea typeface="Calibri" pitchFamily="34" charset="-122"/>
                 <a:cs typeface="Calibri" pitchFamily="34" charset="-120"/>
               </a:rPr>
-              <a:t>place to buy and sell</a:t>
+              <a:t>following, later</a:t>
             </a:r>
             <a:endParaRPr lang="en-US" sz="850" dirty="0"/>
           </a:p>
@@ -30989,11 +31397,11 @@
             </a:avLst>
           </a:prstGeom>
           <a:solidFill>
-            <a:srgbClr val="FCE7F3"/>
+            <a:srgbClr val="CCFBF1"/>
           </a:solidFill>
           <a:ln w="19050">
             <a:solidFill>
-              <a:srgbClr val="DB2777"/>
+              <a:srgbClr val="0D9488"/>
             </a:solidFill>
             <a:prstDash val="solid"/>
           </a:ln>
@@ -31033,13 +31441,13 @@
             <a:r>
               <a:rPr lang="en-US" sz="1300" b="1" dirty="0">
                 <a:solidFill>
-                  <a:srgbClr val="9D174D"/>
+                  <a:srgbClr val="0F766E"/>
                 </a:solidFill>
                 <a:latin typeface="Trebuchet MS" pitchFamily="34" charset="0"/>
                 <a:ea typeface="Trebuchet MS" pitchFamily="34" charset="-122"/>
                 <a:cs typeface="Trebuchet MS" pitchFamily="34" charset="-120"/>
               </a:rPr>
-              <a:t>ed</a:t>
+              <a:t>market</a:t>
             </a:r>
             <a:endParaRPr lang="en-US" sz="1300" dirty="0"/>
           </a:p>
@@ -31078,7 +31486,7 @@
                 <a:ea typeface="Calibri" pitchFamily="34" charset="-122"/>
                 <a:cs typeface="Calibri" pitchFamily="34" charset="-120"/>
               </a:rPr>
-              <a:t>happened in the past</a:t>
+              <a:t>place to buy and sell</a:t>
             </a:r>
             <a:endParaRPr lang="en-US" sz="850" dirty="0"/>
           </a:p>
@@ -31185,8 +31593,8 @@
         </p:nvSpPr>
         <p:spPr>
           <a:xfrm>
-            <a:off x="2313432" y="3364992"/>
-            <a:ext cx="1645920" cy="475488"/>
+            <a:off x="1975104" y="3364992"/>
+            <a:ext cx="1554480" cy="475488"/>
           </a:xfrm>
           <a:prstGeom prst="rect">
             <a:avLst>
@@ -31212,8 +31620,8 @@
         </p:nvSpPr>
         <p:spPr>
           <a:xfrm>
-            <a:off x="2313432" y="3364992"/>
-            <a:ext cx="1645920" cy="475488"/>
+            <a:off x="1975104" y="3364992"/>
+            <a:ext cx="1554480" cy="475488"/>
           </a:xfrm>
           <a:prstGeom prst="rect">
             <a:avLst/>
@@ -31237,7 +31645,7 @@
                 <a:ea typeface="Trebuchet MS" pitchFamily="34" charset="-122"/>
                 <a:cs typeface="Trebuchet MS" pitchFamily="34" charset="-120"/>
               </a:rPr>
-              <a:t>mar</a:t>
+              <a:t>af</a:t>
             </a:r>
             <a:endParaRPr lang="en-US" sz="1400" dirty="0"/>
           </a:p>
@@ -31251,8 +31659,8 @@
         </p:nvSpPr>
         <p:spPr>
           <a:xfrm>
-            <a:off x="3959352" y="3364992"/>
-            <a:ext cx="411480" cy="475488"/>
+            <a:off x="3529584" y="3364992"/>
+            <a:ext cx="73152" cy="475488"/>
           </a:xfrm>
           <a:prstGeom prst="rect">
             <a:avLst/>
@@ -31290,8 +31698,8 @@
         </p:nvSpPr>
         <p:spPr>
           <a:xfrm>
-            <a:off x="4370832" y="3364992"/>
-            <a:ext cx="1645920" cy="475488"/>
+            <a:off x="3602736" y="3364992"/>
+            <a:ext cx="1554480" cy="475488"/>
           </a:xfrm>
           <a:prstGeom prst="rect">
             <a:avLst>
@@ -31317,8 +31725,8 @@
         </p:nvSpPr>
         <p:spPr>
           <a:xfrm>
-            <a:off x="4370832" y="3364992"/>
-            <a:ext cx="1645920" cy="475488"/>
+            <a:off x="3602736" y="3364992"/>
+            <a:ext cx="1554480" cy="475488"/>
           </a:xfrm>
           <a:prstGeom prst="rect">
             <a:avLst/>
@@ -31342,7 +31750,7 @@
                 <a:ea typeface="Trebuchet MS" pitchFamily="34" charset="-122"/>
                 <a:cs typeface="Trebuchet MS" pitchFamily="34" charset="-120"/>
               </a:rPr>
-              <a:t>ket</a:t>
+              <a:t>ter</a:t>
             </a:r>
             <a:endParaRPr lang="en-US" sz="1400" dirty="0"/>
           </a:p>
@@ -31356,8 +31764,8 @@
         </p:nvSpPr>
         <p:spPr>
           <a:xfrm>
-            <a:off x="6016752" y="3364992"/>
-            <a:ext cx="411480" cy="475488"/>
+            <a:off x="5157216" y="3364992"/>
+            <a:ext cx="73152" cy="475488"/>
           </a:xfrm>
           <a:prstGeom prst="rect">
             <a:avLst/>
@@ -31395,8 +31803,8 @@
         </p:nvSpPr>
         <p:spPr>
           <a:xfrm>
-            <a:off x="6428232" y="3364992"/>
-            <a:ext cx="1645920" cy="475488"/>
+            <a:off x="5230368" y="3364992"/>
+            <a:ext cx="1554480" cy="475488"/>
           </a:xfrm>
           <a:prstGeom prst="rect">
             <a:avLst>
@@ -31422,8 +31830,8 @@
         </p:nvSpPr>
         <p:spPr>
           <a:xfrm>
-            <a:off x="6428232" y="3364992"/>
-            <a:ext cx="1645920" cy="475488"/>
+            <a:off x="5230368" y="3364992"/>
+            <a:ext cx="1554480" cy="475488"/>
           </a:xfrm>
           <a:prstGeom prst="rect">
             <a:avLst/>
@@ -31447,7 +31855,7 @@
                 <a:ea typeface="Trebuchet MS" pitchFamily="34" charset="-122"/>
                 <a:cs typeface="Trebuchet MS" pitchFamily="34" charset="-120"/>
               </a:rPr>
-              <a:t>ed</a:t>
+              <a:t>mar</a:t>
             </a:r>
             <a:endParaRPr lang="en-US" sz="1400" dirty="0"/>
           </a:p>
@@ -31455,7 +31863,112 @@
       </p:sp>
       <p:sp>
         <p:nvSpPr>
-          <p:cNvPr id="33" name="Shape 31"/>
+          <p:cNvPr id="33" name="Text 31"/>
+          <p:cNvSpPr/>
+          <p:nvPr/>
+        </p:nvSpPr>
+        <p:spPr>
+          <a:xfrm>
+            <a:off x="6784848" y="3364992"/>
+            <a:ext cx="73152" cy="475488"/>
+          </a:xfrm>
+          <a:prstGeom prst="rect">
+            <a:avLst/>
+          </a:prstGeom>
+          <a:noFill/>
+          <a:ln/>
+        </p:spPr>
+        <p:txBody>
+          <a:bodyPr wrap="square" lIns="0" tIns="0" rIns="0" bIns="0" rtlCol="0" anchor="ctr"/>
+          <a:lstStyle/>
+          <a:p>
+            <a:pPr algn="ctr" indent="0" marL="0">
+              <a:buNone/>
+            </a:pPr>
+            <a:r>
+              <a:rPr lang="en-US" sz="1600" b="1" dirty="0">
+                <a:solidFill>
+                  <a:srgbClr val="0D9488"/>
+                </a:solidFill>
+                <a:latin typeface="Trebuchet MS" pitchFamily="34" charset="0"/>
+                <a:ea typeface="Trebuchet MS" pitchFamily="34" charset="-122"/>
+                <a:cs typeface="Trebuchet MS" pitchFamily="34" charset="-120"/>
+              </a:rPr>
+              <a:t>·</a:t>
+            </a:r>
+            <a:endParaRPr lang="en-US" sz="1600" dirty="0"/>
+          </a:p>
+        </p:txBody>
+      </p:sp>
+      <p:sp>
+        <p:nvSpPr>
+          <p:cNvPr id="34" name="Shape 32"/>
+          <p:cNvSpPr/>
+          <p:nvPr/>
+        </p:nvSpPr>
+        <p:spPr>
+          <a:xfrm>
+            <a:off x="6858000" y="3364992"/>
+            <a:ext cx="1554480" cy="475488"/>
+          </a:xfrm>
+          <a:prstGeom prst="rect">
+            <a:avLst>
+              <a:gd name="adj" fmla="val 9615"/>
+            </a:avLst>
+          </a:prstGeom>
+          <a:solidFill>
+            <a:srgbClr val="FFFFFF"/>
+          </a:solidFill>
+          <a:ln w="12700">
+            <a:solidFill>
+              <a:srgbClr val="0D9488"/>
+            </a:solidFill>
+            <a:prstDash val="solid"/>
+          </a:ln>
+        </p:spPr>
+      </p:sp>
+      <p:sp>
+        <p:nvSpPr>
+          <p:cNvPr id="35" name="Text 33"/>
+          <p:cNvSpPr/>
+          <p:nvPr/>
+        </p:nvSpPr>
+        <p:spPr>
+          <a:xfrm>
+            <a:off x="6858000" y="3364992"/>
+            <a:ext cx="1554480" cy="475488"/>
+          </a:xfrm>
+          <a:prstGeom prst="rect">
+            <a:avLst/>
+          </a:prstGeom>
+          <a:noFill/>
+          <a:ln/>
+        </p:spPr>
+        <p:txBody>
+          <a:bodyPr wrap="square" lIns="0" tIns="0" rIns="0" bIns="0" rtlCol="0" anchor="ctr"/>
+          <a:lstStyle/>
+          <a:p>
+            <a:pPr algn="ctr" indent="0" marL="0">
+              <a:buNone/>
+            </a:pPr>
+            <a:r>
+              <a:rPr lang="en-US" sz="1400" b="1" dirty="0">
+                <a:solidFill>
+                  <a:srgbClr val="0D9488"/>
+                </a:solidFill>
+                <a:latin typeface="Trebuchet MS" pitchFamily="34" charset="0"/>
+                <a:ea typeface="Trebuchet MS" pitchFamily="34" charset="-122"/>
+                <a:cs typeface="Trebuchet MS" pitchFamily="34" charset="-120"/>
+              </a:rPr>
+              <a:t>ket</a:t>
+            </a:r>
+            <a:endParaRPr lang="en-US" sz="1400" dirty="0"/>
+          </a:p>
+        </p:txBody>
+      </p:sp>
+      <p:sp>
+        <p:nvSpPr>
+          <p:cNvPr id="36" name="Shape 34"/>
           <p:cNvSpPr/>
           <p:nvPr/>
         </p:nvSpPr>
@@ -31482,7 +31995,7 @@
       </p:sp>
       <p:sp>
         <p:nvSpPr>
-          <p:cNvPr id="34" name="Text 32"/>
+          <p:cNvPr id="37" name="Text 35"/>
           <p:cNvSpPr/>
           <p:nvPr/>
         </p:nvSpPr>
@@ -31521,7 +32034,7 @@
       </p:sp>
       <p:sp>
         <p:nvSpPr>
-          <p:cNvPr id="35" name="Shape 33"/>
+          <p:cNvPr id="38" name="Shape 36"/>
           <p:cNvSpPr/>
           <p:nvPr/>
         </p:nvSpPr>
@@ -31548,7 +32061,7 @@
       </p:sp>
       <p:sp>
         <p:nvSpPr>
-          <p:cNvPr id="36" name="Text 34"/>
+          <p:cNvPr id="39" name="Text 37"/>
           <p:cNvSpPr/>
           <p:nvPr/>
         </p:nvSpPr>
@@ -32010,7 +32523,7 @@
                 <a:ea typeface="Trebuchet MS" pitchFamily="34" charset="-122"/>
                 <a:cs typeface="Trebuchet MS" pitchFamily="34" charset="-120"/>
               </a:rPr>
-              <a:t>marketed</a:t>
+              <a:t>aftermarket</a:t>
             </a:r>
             <a:endParaRPr lang="en-US" sz="2800" dirty="0"/>
           </a:p>
@@ -32099,11 +32612,11 @@
             </a:avLst>
           </a:prstGeom>
           <a:solidFill>
-            <a:srgbClr val="CCFBF1"/>
+            <a:srgbClr val="DDD6FE"/>
           </a:solidFill>
           <a:ln w="19050">
             <a:solidFill>
-              <a:srgbClr val="0D9488"/>
+              <a:srgbClr val="7C3AED"/>
             </a:solidFill>
             <a:prstDash val="solid"/>
           </a:ln>
@@ -32143,13 +32656,13 @@
             <a:r>
               <a:rPr lang="en-US" sz="1300" b="1" dirty="0">
                 <a:solidFill>
-                  <a:srgbClr val="0F766E"/>
+                  <a:srgbClr val="4C1D95"/>
                 </a:solidFill>
                 <a:latin typeface="Trebuchet MS" pitchFamily="34" charset="0"/>
                 <a:ea typeface="Trebuchet MS" pitchFamily="34" charset="-122"/>
                 <a:cs typeface="Trebuchet MS" pitchFamily="34" charset="-120"/>
               </a:rPr>
-              <a:t>market</a:t>
+              <a:t>after</a:t>
             </a:r>
             <a:endParaRPr lang="en-US" sz="1300" dirty="0"/>
           </a:p>
@@ -32188,7 +32701,7 @@
                 <a:ea typeface="Calibri" pitchFamily="34" charset="-122"/>
                 <a:cs typeface="Calibri" pitchFamily="34" charset="-120"/>
               </a:rPr>
-              <a:t>place to buy and sell</a:t>
+              <a:t>following, later</a:t>
             </a:r>
             <a:endParaRPr lang="en-US" sz="850" dirty="0"/>
           </a:p>
@@ -32211,11 +32724,11 @@
             </a:avLst>
           </a:prstGeom>
           <a:solidFill>
-            <a:srgbClr val="FCE7F3"/>
+            <a:srgbClr val="CCFBF1"/>
           </a:solidFill>
           <a:ln w="19050">
             <a:solidFill>
-              <a:srgbClr val="DB2777"/>
+              <a:srgbClr val="0D9488"/>
             </a:solidFill>
             <a:prstDash val="solid"/>
           </a:ln>
@@ -32255,13 +32768,13 @@
             <a:r>
               <a:rPr lang="en-US" sz="1300" b="1" dirty="0">
                 <a:solidFill>
-                  <a:srgbClr val="9D174D"/>
+                  <a:srgbClr val="0F766E"/>
                 </a:solidFill>
                 <a:latin typeface="Trebuchet MS" pitchFamily="34" charset="0"/>
                 <a:ea typeface="Trebuchet MS" pitchFamily="34" charset="-122"/>
                 <a:cs typeface="Trebuchet MS" pitchFamily="34" charset="-120"/>
               </a:rPr>
-              <a:t>ed</a:t>
+              <a:t>market</a:t>
             </a:r>
             <a:endParaRPr lang="en-US" sz="1300" dirty="0"/>
           </a:p>
@@ -32300,7 +32813,7 @@
                 <a:ea typeface="Calibri" pitchFamily="34" charset="-122"/>
                 <a:cs typeface="Calibri" pitchFamily="34" charset="-120"/>
               </a:rPr>
-              <a:t>happened in the past</a:t>
+              <a:t>place to buy and sell</a:t>
             </a:r>
             <a:endParaRPr lang="en-US" sz="850" dirty="0"/>
           </a:p>
@@ -32407,8 +32920,8 @@
         </p:nvSpPr>
         <p:spPr>
           <a:xfrm>
-            <a:off x="2313432" y="3364992"/>
-            <a:ext cx="1645920" cy="475488"/>
+            <a:off x="1975104" y="3364992"/>
+            <a:ext cx="1554480" cy="475488"/>
           </a:xfrm>
           <a:prstGeom prst="rect">
             <a:avLst>
@@ -32434,8 +32947,8 @@
         </p:nvSpPr>
         <p:spPr>
           <a:xfrm>
-            <a:off x="2313432" y="3364992"/>
-            <a:ext cx="1645920" cy="475488"/>
+            <a:off x="1975104" y="3364992"/>
+            <a:ext cx="1554480" cy="475488"/>
           </a:xfrm>
           <a:prstGeom prst="rect">
             <a:avLst/>
@@ -32459,7 +32972,7 @@
                 <a:ea typeface="Trebuchet MS" pitchFamily="34" charset="-122"/>
                 <a:cs typeface="Trebuchet MS" pitchFamily="34" charset="-120"/>
               </a:rPr>
-              <a:t>mar</a:t>
+              <a:t>af</a:t>
             </a:r>
             <a:endParaRPr lang="en-US" sz="1400" dirty="0"/>
           </a:p>
@@ -32473,8 +32986,8 @@
         </p:nvSpPr>
         <p:spPr>
           <a:xfrm>
-            <a:off x="3959352" y="3364992"/>
-            <a:ext cx="411480" cy="475488"/>
+            <a:off x="3529584" y="3364992"/>
+            <a:ext cx="73152" cy="475488"/>
           </a:xfrm>
           <a:prstGeom prst="rect">
             <a:avLst/>
@@ -32512,8 +33025,8 @@
         </p:nvSpPr>
         <p:spPr>
           <a:xfrm>
-            <a:off x="4370832" y="3364992"/>
-            <a:ext cx="1645920" cy="475488"/>
+            <a:off x="3602736" y="3364992"/>
+            <a:ext cx="1554480" cy="475488"/>
           </a:xfrm>
           <a:prstGeom prst="rect">
             <a:avLst>
@@ -32539,8 +33052,8 @@
         </p:nvSpPr>
         <p:spPr>
           <a:xfrm>
-            <a:off x="4370832" y="3364992"/>
-            <a:ext cx="1645920" cy="475488"/>
+            <a:off x="3602736" y="3364992"/>
+            <a:ext cx="1554480" cy="475488"/>
           </a:xfrm>
           <a:prstGeom prst="rect">
             <a:avLst/>
@@ -32564,7 +33077,7 @@
                 <a:ea typeface="Trebuchet MS" pitchFamily="34" charset="-122"/>
                 <a:cs typeface="Trebuchet MS" pitchFamily="34" charset="-120"/>
               </a:rPr>
-              <a:t>ket</a:t>
+              <a:t>ter</a:t>
             </a:r>
             <a:endParaRPr lang="en-US" sz="1400" dirty="0"/>
           </a:p>
@@ -32578,8 +33091,8 @@
         </p:nvSpPr>
         <p:spPr>
           <a:xfrm>
-            <a:off x="6016752" y="3364992"/>
-            <a:ext cx="411480" cy="475488"/>
+            <a:off x="5157216" y="3364992"/>
+            <a:ext cx="73152" cy="475488"/>
           </a:xfrm>
           <a:prstGeom prst="rect">
             <a:avLst/>
@@ -32617,8 +33130,8 @@
         </p:nvSpPr>
         <p:spPr>
           <a:xfrm>
-            <a:off x="6428232" y="3364992"/>
-            <a:ext cx="1645920" cy="475488"/>
+            <a:off x="5230368" y="3364992"/>
+            <a:ext cx="1554480" cy="475488"/>
           </a:xfrm>
           <a:prstGeom prst="rect">
             <a:avLst>
@@ -32644,8 +33157,8 @@
         </p:nvSpPr>
         <p:spPr>
           <a:xfrm>
-            <a:off x="6428232" y="3364992"/>
-            <a:ext cx="1645920" cy="475488"/>
+            <a:off x="5230368" y="3364992"/>
+            <a:ext cx="1554480" cy="475488"/>
           </a:xfrm>
           <a:prstGeom prst="rect">
             <a:avLst/>
@@ -32669,7 +33182,7 @@
                 <a:ea typeface="Trebuchet MS" pitchFamily="34" charset="-122"/>
                 <a:cs typeface="Trebuchet MS" pitchFamily="34" charset="-120"/>
               </a:rPr>
-              <a:t>ed</a:t>
+              <a:t>mar</a:t>
             </a:r>
             <a:endParaRPr lang="en-US" sz="1400" dirty="0"/>
           </a:p>
@@ -32677,7 +33190,112 @@
       </p:sp>
       <p:sp>
         <p:nvSpPr>
-          <p:cNvPr id="33" name="Shape 31"/>
+          <p:cNvPr id="33" name="Text 31"/>
+          <p:cNvSpPr/>
+          <p:nvPr/>
+        </p:nvSpPr>
+        <p:spPr>
+          <a:xfrm>
+            <a:off x="6784848" y="3364992"/>
+            <a:ext cx="73152" cy="475488"/>
+          </a:xfrm>
+          <a:prstGeom prst="rect">
+            <a:avLst/>
+          </a:prstGeom>
+          <a:noFill/>
+          <a:ln/>
+        </p:spPr>
+        <p:txBody>
+          <a:bodyPr wrap="square" lIns="0" tIns="0" rIns="0" bIns="0" rtlCol="0" anchor="ctr"/>
+          <a:lstStyle/>
+          <a:p>
+            <a:pPr algn="ctr" indent="0" marL="0">
+              <a:buNone/>
+            </a:pPr>
+            <a:r>
+              <a:rPr lang="en-US" sz="1600" b="1" dirty="0">
+                <a:solidFill>
+                  <a:srgbClr val="0D9488"/>
+                </a:solidFill>
+                <a:latin typeface="Trebuchet MS" pitchFamily="34" charset="0"/>
+                <a:ea typeface="Trebuchet MS" pitchFamily="34" charset="-122"/>
+                <a:cs typeface="Trebuchet MS" pitchFamily="34" charset="-120"/>
+              </a:rPr>
+              <a:t>·</a:t>
+            </a:r>
+            <a:endParaRPr lang="en-US" sz="1600" dirty="0"/>
+          </a:p>
+        </p:txBody>
+      </p:sp>
+      <p:sp>
+        <p:nvSpPr>
+          <p:cNvPr id="34" name="Shape 32"/>
+          <p:cNvSpPr/>
+          <p:nvPr/>
+        </p:nvSpPr>
+        <p:spPr>
+          <a:xfrm>
+            <a:off x="6858000" y="3364992"/>
+            <a:ext cx="1554480" cy="475488"/>
+          </a:xfrm>
+          <a:prstGeom prst="rect">
+            <a:avLst>
+              <a:gd name="adj" fmla="val 9615"/>
+            </a:avLst>
+          </a:prstGeom>
+          <a:solidFill>
+            <a:srgbClr val="FFFFFF"/>
+          </a:solidFill>
+          <a:ln w="12700">
+            <a:solidFill>
+              <a:srgbClr val="0D9488"/>
+            </a:solidFill>
+            <a:prstDash val="solid"/>
+          </a:ln>
+        </p:spPr>
+      </p:sp>
+      <p:sp>
+        <p:nvSpPr>
+          <p:cNvPr id="35" name="Text 33"/>
+          <p:cNvSpPr/>
+          <p:nvPr/>
+        </p:nvSpPr>
+        <p:spPr>
+          <a:xfrm>
+            <a:off x="6858000" y="3364992"/>
+            <a:ext cx="1554480" cy="475488"/>
+          </a:xfrm>
+          <a:prstGeom prst="rect">
+            <a:avLst/>
+          </a:prstGeom>
+          <a:noFill/>
+          <a:ln/>
+        </p:spPr>
+        <p:txBody>
+          <a:bodyPr wrap="square" lIns="0" tIns="0" rIns="0" bIns="0" rtlCol="0" anchor="ctr"/>
+          <a:lstStyle/>
+          <a:p>
+            <a:pPr algn="ctr" indent="0" marL="0">
+              <a:buNone/>
+            </a:pPr>
+            <a:r>
+              <a:rPr lang="en-US" sz="1400" b="1" dirty="0">
+                <a:solidFill>
+                  <a:srgbClr val="0D9488"/>
+                </a:solidFill>
+                <a:latin typeface="Trebuchet MS" pitchFamily="34" charset="0"/>
+                <a:ea typeface="Trebuchet MS" pitchFamily="34" charset="-122"/>
+                <a:cs typeface="Trebuchet MS" pitchFamily="34" charset="-120"/>
+              </a:rPr>
+              <a:t>ket</a:t>
+            </a:r>
+            <a:endParaRPr lang="en-US" sz="1400" dirty="0"/>
+          </a:p>
+        </p:txBody>
+      </p:sp>
+      <p:sp>
+        <p:nvSpPr>
+          <p:cNvPr id="36" name="Shape 34"/>
           <p:cNvSpPr/>
           <p:nvPr/>
         </p:nvSpPr>
@@ -32704,7 +33322,7 @@
       </p:sp>
       <p:sp>
         <p:nvSpPr>
-          <p:cNvPr id="34" name="Text 32"/>
+          <p:cNvPr id="37" name="Text 35"/>
           <p:cNvSpPr/>
           <p:nvPr/>
         </p:nvSpPr>
@@ -32743,7 +33361,7 @@
       </p:sp>
       <p:sp>
         <p:nvSpPr>
-          <p:cNvPr id="35" name="Shape 33"/>
+          <p:cNvPr id="38" name="Shape 36"/>
           <p:cNvSpPr/>
           <p:nvPr/>
         </p:nvSpPr>
@@ -32770,14 +33388,14 @@
       </p:sp>
       <p:sp>
         <p:nvSpPr>
-          <p:cNvPr id="36" name="Shape 34"/>
-          <p:cNvSpPr/>
-          <p:nvPr/>
-        </p:nvSpPr>
-        <p:spPr>
-          <a:xfrm>
-            <a:off x="2124837" y="4169664"/>
-            <a:ext cx="685800" cy="475488"/>
+          <p:cNvPr id="39" name="Shape 37"/>
+          <p:cNvSpPr/>
+          <p:nvPr/>
+        </p:nvSpPr>
+        <p:spPr>
+          <a:xfrm>
+            <a:off x="1951330" y="4169664"/>
+            <a:ext cx="676656" cy="475488"/>
           </a:xfrm>
           <a:prstGeom prst="rect">
             <a:avLst>
@@ -32797,14 +33415,14 @@
       </p:sp>
       <p:sp>
         <p:nvSpPr>
-          <p:cNvPr id="37" name="Text 35"/>
-          <p:cNvSpPr/>
-          <p:nvPr/>
-        </p:nvSpPr>
-        <p:spPr>
-          <a:xfrm>
-            <a:off x="2124837" y="4169664"/>
-            <a:ext cx="685800" cy="475488"/>
+          <p:cNvPr id="40" name="Text 38"/>
+          <p:cNvSpPr/>
+          <p:nvPr/>
+        </p:nvSpPr>
+        <p:spPr>
+          <a:xfrm>
+            <a:off x="1951330" y="4169664"/>
+            <a:ext cx="676656" cy="475488"/>
           </a:xfrm>
           <a:prstGeom prst="rect">
             <a:avLst/>
@@ -32828,7 +33446,7 @@
                 <a:ea typeface="Trebuchet MS" pitchFamily="34" charset="-122"/>
                 <a:cs typeface="Trebuchet MS" pitchFamily="34" charset="-120"/>
               </a:rPr>
-              <a:t>m</a:t>
+              <a:t>a</a:t>
             </a:r>
             <a:endParaRPr lang="en-US" sz="900" dirty="0"/>
           </a:p>
@@ -32836,14 +33454,14 @@
       </p:sp>
       <p:sp>
         <p:nvSpPr>
-          <p:cNvPr id="38" name="Shape 36"/>
-          <p:cNvSpPr/>
-          <p:nvPr/>
-        </p:nvSpPr>
-        <p:spPr>
-          <a:xfrm>
-            <a:off x="3033522" y="4169664"/>
-            <a:ext cx="685800" cy="475488"/>
+          <p:cNvPr id="41" name="Shape 39"/>
+          <p:cNvSpPr/>
+          <p:nvPr/>
+        </p:nvSpPr>
+        <p:spPr>
+          <a:xfrm>
+            <a:off x="2677363" y="4169664"/>
+            <a:ext cx="676656" cy="475488"/>
           </a:xfrm>
           <a:prstGeom prst="rect">
             <a:avLst>
@@ -32863,14 +33481,14 @@
       </p:sp>
       <p:sp>
         <p:nvSpPr>
-          <p:cNvPr id="39" name="Text 37"/>
-          <p:cNvSpPr/>
-          <p:nvPr/>
-        </p:nvSpPr>
-        <p:spPr>
-          <a:xfrm>
-            <a:off x="3033522" y="4169664"/>
-            <a:ext cx="685800" cy="475488"/>
+          <p:cNvPr id="42" name="Text 40"/>
+          <p:cNvSpPr/>
+          <p:nvPr/>
+        </p:nvSpPr>
+        <p:spPr>
+          <a:xfrm>
+            <a:off x="2677363" y="4169664"/>
+            <a:ext cx="676656" cy="475488"/>
           </a:xfrm>
           <a:prstGeom prst="rect">
             <a:avLst/>
@@ -32894,7 +33512,7 @@
                 <a:ea typeface="Trebuchet MS" pitchFamily="34" charset="-122"/>
                 <a:cs typeface="Trebuchet MS" pitchFamily="34" charset="-120"/>
               </a:rPr>
-              <a:t>ar</a:t>
+              <a:t>f</a:t>
             </a:r>
             <a:endParaRPr lang="en-US" sz="900" dirty="0"/>
           </a:p>
@@ -32902,14 +33520,14 @@
       </p:sp>
       <p:sp>
         <p:nvSpPr>
-          <p:cNvPr id="40" name="Shape 38"/>
-          <p:cNvSpPr/>
-          <p:nvPr/>
-        </p:nvSpPr>
-        <p:spPr>
-          <a:xfrm>
-            <a:off x="3942207" y="4169664"/>
-            <a:ext cx="685800" cy="475488"/>
+          <p:cNvPr id="43" name="Shape 41"/>
+          <p:cNvSpPr/>
+          <p:nvPr/>
+        </p:nvSpPr>
+        <p:spPr>
+          <a:xfrm>
+            <a:off x="3403397" y="4169664"/>
+            <a:ext cx="676656" cy="475488"/>
           </a:xfrm>
           <a:prstGeom prst="rect">
             <a:avLst>
@@ -32929,14 +33547,14 @@
       </p:sp>
       <p:sp>
         <p:nvSpPr>
-          <p:cNvPr id="41" name="Text 39"/>
-          <p:cNvSpPr/>
-          <p:nvPr/>
-        </p:nvSpPr>
-        <p:spPr>
-          <a:xfrm>
-            <a:off x="3942207" y="4169664"/>
-            <a:ext cx="685800" cy="475488"/>
+          <p:cNvPr id="44" name="Text 42"/>
+          <p:cNvSpPr/>
+          <p:nvPr/>
+        </p:nvSpPr>
+        <p:spPr>
+          <a:xfrm>
+            <a:off x="3403397" y="4169664"/>
+            <a:ext cx="676656" cy="475488"/>
           </a:xfrm>
           <a:prstGeom prst="rect">
             <a:avLst/>
@@ -32960,7 +33578,7 @@
                 <a:ea typeface="Trebuchet MS" pitchFamily="34" charset="-122"/>
                 <a:cs typeface="Trebuchet MS" pitchFamily="34" charset="-120"/>
               </a:rPr>
-              <a:t>k</a:t>
+              <a:t>t</a:t>
             </a:r>
             <a:endParaRPr lang="en-US" sz="900" dirty="0"/>
           </a:p>
@@ -32968,14 +33586,14 @@
       </p:sp>
       <p:sp>
         <p:nvSpPr>
-          <p:cNvPr id="42" name="Shape 40"/>
-          <p:cNvSpPr/>
-          <p:nvPr/>
-        </p:nvSpPr>
-        <p:spPr>
-          <a:xfrm>
-            <a:off x="4850892" y="4169664"/>
-            <a:ext cx="685800" cy="475488"/>
+          <p:cNvPr id="45" name="Shape 43"/>
+          <p:cNvSpPr/>
+          <p:nvPr/>
+        </p:nvSpPr>
+        <p:spPr>
+          <a:xfrm>
+            <a:off x="4129430" y="4169664"/>
+            <a:ext cx="676656" cy="475488"/>
           </a:xfrm>
           <a:prstGeom prst="rect">
             <a:avLst>
@@ -32995,14 +33613,14 @@
       </p:sp>
       <p:sp>
         <p:nvSpPr>
-          <p:cNvPr id="43" name="Text 41"/>
-          <p:cNvSpPr/>
-          <p:nvPr/>
-        </p:nvSpPr>
-        <p:spPr>
-          <a:xfrm>
-            <a:off x="4850892" y="4169664"/>
-            <a:ext cx="685800" cy="475488"/>
+          <p:cNvPr id="46" name="Text 44"/>
+          <p:cNvSpPr/>
+          <p:nvPr/>
+        </p:nvSpPr>
+        <p:spPr>
+          <a:xfrm>
+            <a:off x="4129430" y="4169664"/>
+            <a:ext cx="676656" cy="475488"/>
           </a:xfrm>
           <a:prstGeom prst="rect">
             <a:avLst/>
@@ -33026,7 +33644,7 @@
                 <a:ea typeface="Trebuchet MS" pitchFamily="34" charset="-122"/>
                 <a:cs typeface="Trebuchet MS" pitchFamily="34" charset="-120"/>
               </a:rPr>
-              <a:t>e</a:t>
+              <a:t>er</a:t>
             </a:r>
             <a:endParaRPr lang="en-US" sz="900" dirty="0"/>
           </a:p>
@@ -33034,14 +33652,14 @@
       </p:sp>
       <p:sp>
         <p:nvSpPr>
-          <p:cNvPr id="44" name="Shape 42"/>
-          <p:cNvSpPr/>
-          <p:nvPr/>
-        </p:nvSpPr>
-        <p:spPr>
-          <a:xfrm>
-            <a:off x="5759577" y="4169664"/>
-            <a:ext cx="685800" cy="475488"/>
+          <p:cNvPr id="47" name="Shape 45"/>
+          <p:cNvSpPr/>
+          <p:nvPr/>
+        </p:nvSpPr>
+        <p:spPr>
+          <a:xfrm>
+            <a:off x="4855464" y="4169664"/>
+            <a:ext cx="676656" cy="475488"/>
           </a:xfrm>
           <a:prstGeom prst="rect">
             <a:avLst>
@@ -33061,14 +33679,14 @@
       </p:sp>
       <p:sp>
         <p:nvSpPr>
-          <p:cNvPr id="45" name="Text 43"/>
-          <p:cNvSpPr/>
-          <p:nvPr/>
-        </p:nvSpPr>
-        <p:spPr>
-          <a:xfrm>
-            <a:off x="5759577" y="4169664"/>
-            <a:ext cx="685800" cy="475488"/>
+          <p:cNvPr id="48" name="Text 46"/>
+          <p:cNvSpPr/>
+          <p:nvPr/>
+        </p:nvSpPr>
+        <p:spPr>
+          <a:xfrm>
+            <a:off x="4855464" y="4169664"/>
+            <a:ext cx="676656" cy="475488"/>
           </a:xfrm>
           <a:prstGeom prst="rect">
             <a:avLst/>
@@ -33092,7 +33710,7 @@
                 <a:ea typeface="Trebuchet MS" pitchFamily="34" charset="-122"/>
                 <a:cs typeface="Trebuchet MS" pitchFamily="34" charset="-120"/>
               </a:rPr>
-              <a:t>t</a:t>
+              <a:t>m</a:t>
             </a:r>
             <a:endParaRPr lang="en-US" sz="900" dirty="0"/>
           </a:p>
@@ -33100,14 +33718,14 @@
       </p:sp>
       <p:sp>
         <p:nvSpPr>
-          <p:cNvPr id="46" name="Shape 44"/>
-          <p:cNvSpPr/>
-          <p:nvPr/>
-        </p:nvSpPr>
-        <p:spPr>
-          <a:xfrm>
-            <a:off x="6668262" y="4169664"/>
-            <a:ext cx="685800" cy="475488"/>
+          <p:cNvPr id="49" name="Shape 47"/>
+          <p:cNvSpPr/>
+          <p:nvPr/>
+        </p:nvSpPr>
+        <p:spPr>
+          <a:xfrm>
+            <a:off x="5581498" y="4169664"/>
+            <a:ext cx="676656" cy="475488"/>
           </a:xfrm>
           <a:prstGeom prst="rect">
             <a:avLst>
@@ -33127,14 +33745,14 @@
       </p:sp>
       <p:sp>
         <p:nvSpPr>
-          <p:cNvPr id="47" name="Text 45"/>
-          <p:cNvSpPr/>
-          <p:nvPr/>
-        </p:nvSpPr>
-        <p:spPr>
-          <a:xfrm>
-            <a:off x="6668262" y="4169664"/>
-            <a:ext cx="685800" cy="475488"/>
+          <p:cNvPr id="50" name="Text 48"/>
+          <p:cNvSpPr/>
+          <p:nvPr/>
+        </p:nvSpPr>
+        <p:spPr>
+          <a:xfrm>
+            <a:off x="5581498" y="4169664"/>
+            <a:ext cx="676656" cy="475488"/>
           </a:xfrm>
           <a:prstGeom prst="rect">
             <a:avLst/>
@@ -33158,7 +33776,7 @@
                 <a:ea typeface="Trebuchet MS" pitchFamily="34" charset="-122"/>
                 <a:cs typeface="Trebuchet MS" pitchFamily="34" charset="-120"/>
               </a:rPr>
-              <a:t>e</a:t>
+              <a:t>ar</a:t>
             </a:r>
             <a:endParaRPr lang="en-US" sz="900" dirty="0"/>
           </a:p>
@@ -33166,14 +33784,14 @@
       </p:sp>
       <p:sp>
         <p:nvSpPr>
-          <p:cNvPr id="48" name="Shape 46"/>
-          <p:cNvSpPr/>
-          <p:nvPr/>
-        </p:nvSpPr>
-        <p:spPr>
-          <a:xfrm>
-            <a:off x="7576947" y="4169664"/>
-            <a:ext cx="685800" cy="475488"/>
+          <p:cNvPr id="51" name="Shape 49"/>
+          <p:cNvSpPr/>
+          <p:nvPr/>
+        </p:nvSpPr>
+        <p:spPr>
+          <a:xfrm>
+            <a:off x="6307531" y="4169664"/>
+            <a:ext cx="676656" cy="475488"/>
           </a:xfrm>
           <a:prstGeom prst="rect">
             <a:avLst>
@@ -33193,14 +33811,14 @@
       </p:sp>
       <p:sp>
         <p:nvSpPr>
-          <p:cNvPr id="49" name="Text 47"/>
-          <p:cNvSpPr/>
-          <p:nvPr/>
-        </p:nvSpPr>
-        <p:spPr>
-          <a:xfrm>
-            <a:off x="7576947" y="4169664"/>
-            <a:ext cx="685800" cy="475488"/>
+          <p:cNvPr id="52" name="Text 50"/>
+          <p:cNvSpPr/>
+          <p:nvPr/>
+        </p:nvSpPr>
+        <p:spPr>
+          <a:xfrm>
+            <a:off x="6307531" y="4169664"/>
+            <a:ext cx="676656" cy="475488"/>
           </a:xfrm>
           <a:prstGeom prst="rect">
             <a:avLst/>
@@ -33224,7 +33842,139 @@
                 <a:ea typeface="Trebuchet MS" pitchFamily="34" charset="-122"/>
                 <a:cs typeface="Trebuchet MS" pitchFamily="34" charset="-120"/>
               </a:rPr>
-              <a:t>d</a:t>
+              <a:t>k</a:t>
+            </a:r>
+            <a:endParaRPr lang="en-US" sz="900" dirty="0"/>
+          </a:p>
+        </p:txBody>
+      </p:sp>
+      <p:sp>
+        <p:nvSpPr>
+          <p:cNvPr id="53" name="Shape 51"/>
+          <p:cNvSpPr/>
+          <p:nvPr/>
+        </p:nvSpPr>
+        <p:spPr>
+          <a:xfrm>
+            <a:off x="7033565" y="4169664"/>
+            <a:ext cx="676656" cy="475488"/>
+          </a:xfrm>
+          <a:prstGeom prst="rect">
+            <a:avLst>
+              <a:gd name="adj" fmla="val 7692"/>
+            </a:avLst>
+          </a:prstGeom>
+          <a:solidFill>
+            <a:srgbClr val="FFFFFF"/>
+          </a:solidFill>
+          <a:ln w="12700">
+            <a:solidFill>
+              <a:srgbClr val="DB2777"/>
+            </a:solidFill>
+            <a:prstDash val="solid"/>
+          </a:ln>
+        </p:spPr>
+      </p:sp>
+      <p:sp>
+        <p:nvSpPr>
+          <p:cNvPr id="54" name="Text 52"/>
+          <p:cNvSpPr/>
+          <p:nvPr/>
+        </p:nvSpPr>
+        <p:spPr>
+          <a:xfrm>
+            <a:off x="7033565" y="4169664"/>
+            <a:ext cx="676656" cy="475488"/>
+          </a:xfrm>
+          <a:prstGeom prst="rect">
+            <a:avLst/>
+          </a:prstGeom>
+          <a:noFill/>
+          <a:ln/>
+        </p:spPr>
+        <p:txBody>
+          <a:bodyPr wrap="square" lIns="0" tIns="0" rIns="0" bIns="0" rtlCol="0" anchor="ctr"/>
+          <a:lstStyle/>
+          <a:p>
+            <a:pPr algn="ctr" indent="0" marL="0">
+              <a:buNone/>
+            </a:pPr>
+            <a:r>
+              <a:rPr lang="en-US" sz="900" b="1" dirty="0">
+                <a:solidFill>
+                  <a:srgbClr val="9D174D"/>
+                </a:solidFill>
+                <a:latin typeface="Trebuchet MS" pitchFamily="34" charset="0"/>
+                <a:ea typeface="Trebuchet MS" pitchFamily="34" charset="-122"/>
+                <a:cs typeface="Trebuchet MS" pitchFamily="34" charset="-120"/>
+              </a:rPr>
+              <a:t>e</a:t>
+            </a:r>
+            <a:endParaRPr lang="en-US" sz="900" dirty="0"/>
+          </a:p>
+        </p:txBody>
+      </p:sp>
+      <p:sp>
+        <p:nvSpPr>
+          <p:cNvPr id="55" name="Shape 53"/>
+          <p:cNvSpPr/>
+          <p:nvPr/>
+        </p:nvSpPr>
+        <p:spPr>
+          <a:xfrm>
+            <a:off x="7759598" y="4169664"/>
+            <a:ext cx="676656" cy="475488"/>
+          </a:xfrm>
+          <a:prstGeom prst="rect">
+            <a:avLst>
+              <a:gd name="adj" fmla="val 7692"/>
+            </a:avLst>
+          </a:prstGeom>
+          <a:solidFill>
+            <a:srgbClr val="FFFFFF"/>
+          </a:solidFill>
+          <a:ln w="12700">
+            <a:solidFill>
+              <a:srgbClr val="DB2777"/>
+            </a:solidFill>
+            <a:prstDash val="solid"/>
+          </a:ln>
+        </p:spPr>
+      </p:sp>
+      <p:sp>
+        <p:nvSpPr>
+          <p:cNvPr id="56" name="Text 54"/>
+          <p:cNvSpPr/>
+          <p:nvPr/>
+        </p:nvSpPr>
+        <p:spPr>
+          <a:xfrm>
+            <a:off x="7759598" y="4169664"/>
+            <a:ext cx="676656" cy="475488"/>
+          </a:xfrm>
+          <a:prstGeom prst="rect">
+            <a:avLst/>
+          </a:prstGeom>
+          <a:noFill/>
+          <a:ln/>
+        </p:spPr>
+        <p:txBody>
+          <a:bodyPr wrap="square" lIns="0" tIns="0" rIns="0" bIns="0" rtlCol="0" anchor="ctr"/>
+          <a:lstStyle/>
+          <a:p>
+            <a:pPr algn="ctr" indent="0" marL="0">
+              <a:buNone/>
+            </a:pPr>
+            <a:r>
+              <a:rPr lang="en-US" sz="900" b="1" dirty="0">
+                <a:solidFill>
+                  <a:srgbClr val="9D174D"/>
+                </a:solidFill>
+                <a:latin typeface="Trebuchet MS" pitchFamily="34" charset="0"/>
+                <a:ea typeface="Trebuchet MS" pitchFamily="34" charset="-122"/>
+                <a:cs typeface="Trebuchet MS" pitchFamily="34" charset="-120"/>
+              </a:rPr>
+              <a:t>t</a:t>
             </a:r>
             <a:endParaRPr lang="en-US" sz="900" dirty="0"/>
           </a:p>
@@ -35331,7 +36081,7 @@
                 <a:ea typeface="Trebuchet MS" pitchFamily="34" charset="-122"/>
                 <a:cs typeface="Trebuchet MS" pitchFamily="34" charset="-120"/>
               </a:rPr>
-              <a:t>mini-</a:t>
+              <a:t>after-</a:t>
             </a:r>
             <a:endParaRPr lang="en-US" sz="1300" dirty="0"/>
           </a:p>
@@ -35484,7 +36234,7 @@
                 <a:ea typeface="Trebuchet MS" pitchFamily="34" charset="-122"/>
                 <a:cs typeface="Trebuchet MS" pitchFamily="34" charset="-120"/>
               </a:rPr>
-              <a:t>flea-</a:t>
+              <a:t>stock-</a:t>
             </a:r>
             <a:endParaRPr lang="en-US" sz="1300" dirty="0"/>
           </a:p>
@@ -35637,7 +36387,7 @@
                 <a:ea typeface="Trebuchet MS" pitchFamily="34" charset="-122"/>
                 <a:cs typeface="Trebuchet MS" pitchFamily="34" charset="-120"/>
               </a:rPr>
-              <a:t>stock-</a:t>
+              <a:t>re-</a:t>
             </a:r>
             <a:endParaRPr lang="en-US" sz="1300" dirty="0"/>
           </a:p>
@@ -35831,7 +36581,7 @@
                 <a:ea typeface="Trebuchet MS" pitchFamily="34" charset="-122"/>
                 <a:cs typeface="Trebuchet MS" pitchFamily="34" charset="-120"/>
               </a:rPr>
-              <a:t>marketing</a:t>
+              <a:t>marketplace</a:t>
             </a:r>
             <a:endParaRPr lang="en-US" sz="1200" dirty="0"/>
           </a:p>
@@ -35897,7 +36647,7 @@
                 <a:ea typeface="Trebuchet MS" pitchFamily="34" charset="-122"/>
                 <a:cs typeface="Trebuchet MS" pitchFamily="34" charset="-120"/>
               </a:rPr>
-              <a:t>marketed</a:t>
+              <a:t>marketing</a:t>
             </a:r>
             <a:endParaRPr lang="en-US" sz="1200" dirty="0"/>
           </a:p>
@@ -35963,7 +36713,7 @@
                 <a:ea typeface="Trebuchet MS" pitchFamily="34" charset="-122"/>
                 <a:cs typeface="Trebuchet MS" pitchFamily="34" charset="-120"/>
               </a:rPr>
-              <a:t>marketer</a:t>
+              <a:t>supermarket</a:t>
             </a:r>
             <a:endParaRPr lang="en-US" sz="1200" dirty="0"/>
           </a:p>
@@ -36029,7 +36779,7 @@
                 <a:ea typeface="Trebuchet MS" pitchFamily="34" charset="-122"/>
                 <a:cs typeface="Trebuchet MS" pitchFamily="34" charset="-120"/>
               </a:rPr>
-              <a:t>marketplace</a:t>
+              <a:t>marketed</a:t>
             </a:r>
             <a:endParaRPr lang="en-US" sz="1200" dirty="0"/>
           </a:p>
@@ -36095,7 +36845,7 @@
                 <a:ea typeface="Trebuchet MS" pitchFamily="34" charset="-122"/>
                 <a:cs typeface="Trebuchet MS" pitchFamily="34" charset="-120"/>
               </a:rPr>
-              <a:t>supermarket</a:t>
+              <a:t>marketer</a:t>
             </a:r>
             <a:endParaRPr lang="en-US" sz="1200" dirty="0"/>
           </a:p>
@@ -36227,7 +36977,7 @@
                 <a:ea typeface="Trebuchet MS" pitchFamily="34" charset="-122"/>
                 <a:cs typeface="Trebuchet MS" pitchFamily="34" charset="-120"/>
               </a:rPr>
-              <a:t>minimarket</a:t>
+              <a:t>aftermarket</a:t>
             </a:r>
             <a:endParaRPr lang="en-US" sz="1200" dirty="0"/>
           </a:p>
@@ -37481,7 +38231,7 @@
                 <a:ea typeface="Calibri" pitchFamily="34" charset="-122"/>
                 <a:cs typeface="Calibri" pitchFamily="34" charset="-120"/>
               </a:rPr>
-              <a:t>1.  The word 'market' comes from a Latin word meaning a place to trade.</a:t>
+              <a:t>1.  The word 'marketing' contains the root 'market' plus the suffix '-ing'.</a:t>
             </a:r>
             <a:endParaRPr lang="en-US" sz="1300" dirty="0"/>
           </a:p>
@@ -37620,7 +38370,7 @@
                 <a:ea typeface="Calibri" pitchFamily="34" charset="-122"/>
                 <a:cs typeface="Calibri" pitchFamily="34" charset="-120"/>
               </a:rPr>
-              <a:t>2.  A supermarket is smaller than a minimarket.</a:t>
+              <a:t>2.  The root 'market' comes from a Latin word meaning a place to trade.</a:t>
             </a:r>
             <a:endParaRPr lang="en-US" sz="1300" dirty="0"/>
           </a:p>
@@ -37643,11 +38393,11 @@
             </a:avLst>
           </a:prstGeom>
           <a:solidFill>
-            <a:srgbClr val="FEE2E2"/>
-          </a:solidFill>
-          <a:ln w="12700">
-            <a:solidFill>
-              <a:srgbClr val="DC2626"/>
+            <a:srgbClr val="DCFCE7"/>
+          </a:solidFill>
+          <a:ln w="12700">
+            <a:solidFill>
+              <a:srgbClr val="16A34A"/>
             </a:solidFill>
             <a:prstDash val="solid"/>
           </a:ln>
@@ -37680,13 +38430,13 @@
             <a:r>
               <a:rPr lang="en-US" sz="1100" b="1" dirty="0">
                 <a:solidFill>
-                  <a:srgbClr val="DC2626"/>
+                  <a:srgbClr val="16A34A"/>
                 </a:solidFill>
                 <a:latin typeface="Trebuchet MS" pitchFamily="34" charset="0"/>
                 <a:ea typeface="Trebuchet MS" pitchFamily="34" charset="-122"/>
                 <a:cs typeface="Trebuchet MS" pitchFamily="34" charset="-120"/>
               </a:rPr>
-              <a:t>FALSE</a:t>
+              <a:t>TRUE</a:t>
             </a:r>
             <a:endParaRPr lang="en-US" sz="1100" dirty="0"/>
           </a:p>
@@ -37759,7 +38509,7 @@
                 <a:ea typeface="Calibri" pitchFamily="34" charset="-122"/>
                 <a:cs typeface="Calibri" pitchFamily="34" charset="-120"/>
               </a:rPr>
-              <a:t>3.  A marketplace is somewhere people can buy and sell goods.</a:t>
+              <a:t>3.  The suffix '-able' in 'marketable' means 'without' or 'not'.</a:t>
             </a:r>
             <a:endParaRPr lang="en-US" sz="1300" dirty="0"/>
           </a:p>
@@ -37782,11 +38532,11 @@
             </a:avLst>
           </a:prstGeom>
           <a:solidFill>
-            <a:srgbClr val="DCFCE7"/>
-          </a:solidFill>
-          <a:ln w="12700">
-            <a:solidFill>
-              <a:srgbClr val="16A34A"/>
+            <a:srgbClr val="FEE2E2"/>
+          </a:solidFill>
+          <a:ln w="12700">
+            <a:solidFill>
+              <a:srgbClr val="DC2626"/>
             </a:solidFill>
             <a:prstDash val="solid"/>
           </a:ln>
@@ -37819,13 +38569,13 @@
             <a:r>
               <a:rPr lang="en-US" sz="1100" b="1" dirty="0">
                 <a:solidFill>
-                  <a:srgbClr val="16A34A"/>
+                  <a:srgbClr val="DC2626"/>
                 </a:solidFill>
                 <a:latin typeface="Trebuchet MS" pitchFamily="34" charset="0"/>
                 <a:ea typeface="Trebuchet MS" pitchFamily="34" charset="-122"/>
                 <a:cs typeface="Trebuchet MS" pitchFamily="34" charset="-120"/>
               </a:rPr>
-              <a:t>TRUE</a:t>
+              <a:t>FALSE</a:t>
             </a:r>
             <a:endParaRPr lang="en-US" sz="1100" dirty="0"/>
           </a:p>
@@ -37898,7 +38648,7 @@
                 <a:ea typeface="Calibri" pitchFamily="34" charset="-122"/>
                 <a:cs typeface="Calibri" pitchFamily="34" charset="-120"/>
               </a:rPr>
-              <a:t>4.  Marketing involves promoting products so people want to buy them.</a:t>
+              <a:t>4.  The word 'hypermarket' uses a prefix that means 'over' or 'beyond'.</a:t>
             </a:r>
             <a:endParaRPr lang="en-US" sz="1300" dirty="0"/>
           </a:p>
@@ -38037,7 +38787,7 @@
                 <a:ea typeface="Calibri" pitchFamily="34" charset="-122"/>
                 <a:cs typeface="Calibri" pitchFamily="34" charset="-120"/>
               </a:rPr>
-              <a:t>5.  The suffix '-able' in 'marketable' means 'without'.</a:t>
+              <a:t>5.  A supermarket is smaller than a regular market.</a:t>
             </a:r>
             <a:endParaRPr lang="en-US" sz="1300" dirty="0"/>
           </a:p>
@@ -38676,7 +39426,7 @@
                 <a:ea typeface="Trebuchet MS" pitchFamily="34" charset="-122"/>
                 <a:cs typeface="Trebuchet MS" pitchFamily="34" charset="-120"/>
               </a:rPr>
-              <a:t>marketing</a:t>
+              <a:t>marketplace</a:t>
             </a:r>
             <a:endParaRPr lang="en-US" sz="1300" dirty="0"/>
           </a:p>
@@ -38742,7 +39492,7 @@
                 <a:ea typeface="Trebuchet MS" pitchFamily="34" charset="-122"/>
                 <a:cs typeface="Trebuchet MS" pitchFamily="34" charset="-120"/>
               </a:rPr>
-              <a:t>marketed</a:t>
+              <a:t>marketing</a:t>
             </a:r>
             <a:endParaRPr lang="en-US" sz="1300" dirty="0"/>
           </a:p>
@@ -38808,7 +39558,7 @@
                 <a:ea typeface="Trebuchet MS" pitchFamily="34" charset="-122"/>
                 <a:cs typeface="Trebuchet MS" pitchFamily="34" charset="-120"/>
               </a:rPr>
-              <a:t>marketer</a:t>
+              <a:t>supermarket</a:t>
             </a:r>
             <a:endParaRPr lang="en-US" sz="1300" dirty="0"/>
           </a:p>
@@ -38874,7 +39624,7 @@
                 <a:ea typeface="Trebuchet MS" pitchFamily="34" charset="-122"/>
                 <a:cs typeface="Trebuchet MS" pitchFamily="34" charset="-120"/>
               </a:rPr>
-              <a:t>marketplace</a:t>
+              <a:t>marketed</a:t>
             </a:r>
             <a:endParaRPr lang="en-US" sz="1300" dirty="0"/>
           </a:p>
@@ -38940,7 +39690,7 @@
                 <a:ea typeface="Trebuchet MS" pitchFamily="34" charset="-122"/>
                 <a:cs typeface="Trebuchet MS" pitchFamily="34" charset="-120"/>
               </a:rPr>
-              <a:t>supermarket</a:t>
+              <a:t>marketer</a:t>
             </a:r>
             <a:endParaRPr lang="en-US" sz="1300" dirty="0"/>
           </a:p>
@@ -39072,7 +39822,7 @@
                 <a:ea typeface="Trebuchet MS" pitchFamily="34" charset="-122"/>
                 <a:cs typeface="Trebuchet MS" pitchFamily="34" charset="-120"/>
               </a:rPr>
-              <a:t>minimarket</a:t>
+              <a:t>aftermarket</a:t>
             </a:r>
             <a:endParaRPr lang="en-US" sz="1300" dirty="0"/>
           </a:p>
@@ -40010,7 +40760,7 @@
                 <a:ea typeface="Trebuchet MS" pitchFamily="34" charset="-122"/>
                 <a:cs typeface="Trebuchet MS" pitchFamily="34" charset="-120"/>
               </a:rPr>
-              <a:t>mini-</a:t>
+              <a:t>after-</a:t>
             </a:r>
             <a:endParaRPr lang="en-US" sz="1300" dirty="0"/>
           </a:p>
@@ -40163,7 +40913,7 @@
                 <a:ea typeface="Trebuchet MS" pitchFamily="34" charset="-122"/>
                 <a:cs typeface="Trebuchet MS" pitchFamily="34" charset="-120"/>
               </a:rPr>
-              <a:t>flea-</a:t>
+              <a:t>stock-</a:t>
             </a:r>
             <a:endParaRPr lang="en-US" sz="1300" dirty="0"/>
           </a:p>
@@ -40316,7 +41066,7 @@
                 <a:ea typeface="Trebuchet MS" pitchFamily="34" charset="-122"/>
                 <a:cs typeface="Trebuchet MS" pitchFamily="34" charset="-120"/>
               </a:rPr>
-              <a:t>stock-</a:t>
+              <a:t>re-</a:t>
             </a:r>
             <a:endParaRPr lang="en-US" sz="1300" dirty="0"/>
           </a:p>
@@ -40846,7 +41596,7 @@
                 <a:ea typeface="Trebuchet MS" pitchFamily="34" charset="-122"/>
                 <a:cs typeface="Trebuchet MS" pitchFamily="34" charset="-120"/>
               </a:rPr>
-              <a:t>marketing</a:t>
+              <a:t>marketplace</a:t>
             </a:r>
             <a:endParaRPr lang="en-US" sz="1400" dirty="0"/>
           </a:p>
@@ -41250,7 +42000,7 @@
                 <a:ea typeface="Trebuchet MS" pitchFamily="34" charset="-122"/>
                 <a:cs typeface="Trebuchet MS" pitchFamily="34" charset="-120"/>
               </a:rPr>
-              <a:t>marketing</a:t>
+              <a:t>marketplace</a:t>
             </a:r>
             <a:endParaRPr lang="en-US" sz="1200" dirty="0"/>
           </a:p>
@@ -41316,7 +42066,7 @@
                 <a:ea typeface="Calibri" pitchFamily="34" charset="-122"/>
                 <a:cs typeface="Calibri" pitchFamily="34" charset="-120"/>
               </a:rPr>
-              <a:t>A small, convenient shop where you can buy everyday items.</a:t>
+              <a:t>The buying and selling of spare parts or accessories for something you already own, like a car.</a:t>
             </a:r>
             <a:endParaRPr lang="en-US" sz="1200" dirty="0"/>
           </a:p>
@@ -41389,7 +42139,7 @@
                 <a:ea typeface="Trebuchet MS" pitchFamily="34" charset="-122"/>
                 <a:cs typeface="Trebuchet MS" pitchFamily="34" charset="-120"/>
               </a:rPr>
-              <a:t>marketed</a:t>
+              <a:t>marketing</a:t>
             </a:r>
             <a:endParaRPr lang="en-US" sz="1200" dirty="0"/>
           </a:p>
@@ -41455,7 +42205,7 @@
                 <a:ea typeface="Calibri" pitchFamily="34" charset="-122"/>
                 <a:cs typeface="Calibri" pitchFamily="34" charset="-120"/>
               </a:rPr>
-              <a:t>A place, sometimes online, where people buy and sell things.</a:t>
+              <a:t>When something has been advertised and sold to customers.</a:t>
             </a:r>
             <a:endParaRPr lang="en-US" sz="1200" dirty="0"/>
           </a:p>
@@ -41528,7 +42278,7 @@
                 <a:ea typeface="Trebuchet MS" pitchFamily="34" charset="-122"/>
                 <a:cs typeface="Trebuchet MS" pitchFamily="34" charset="-120"/>
               </a:rPr>
-              <a:t>marketer</a:t>
+              <a:t>supermarket</a:t>
             </a:r>
             <a:endParaRPr lang="en-US" sz="1200" dirty="0"/>
           </a:p>
@@ -41594,7 +42344,7 @@
                 <a:ea typeface="Calibri" pitchFamily="34" charset="-122"/>
                 <a:cs typeface="Calibri" pitchFamily="34" charset="-120"/>
               </a:rPr>
-              <a:t>A large shop where you can buy food and household items.</a:t>
+              <a:t>A person whose job is to promote products and convince people to buy them.</a:t>
             </a:r>
             <a:endParaRPr lang="en-US" sz="1200" dirty="0"/>
           </a:p>
@@ -41667,7 +42417,7 @@
                 <a:ea typeface="Trebuchet MS" pitchFamily="34" charset="-122"/>
                 <a:cs typeface="Trebuchet MS" pitchFamily="34" charset="-120"/>
               </a:rPr>
-              <a:t>marketplace</a:t>
+              <a:t>marketed</a:t>
             </a:r>
             <a:endParaRPr lang="en-US" sz="1200" dirty="0"/>
           </a:p>
@@ -41733,7 +42483,7 @@
                 <a:ea typeface="Calibri" pitchFamily="34" charset="-122"/>
                 <a:cs typeface="Calibri" pitchFamily="34" charset="-120"/>
               </a:rPr>
-              <a:t>A person whose job is to promote and sell products.</a:t>
+              <a:t>A large shop where you can buy food, drinks, and household items all in one place.</a:t>
             </a:r>
             <a:endParaRPr lang="en-US" sz="1200" dirty="0"/>
           </a:p>
@@ -41806,7 +42556,7 @@
                 <a:ea typeface="Trebuchet MS" pitchFamily="34" charset="-122"/>
                 <a:cs typeface="Trebuchet MS" pitchFamily="34" charset="-120"/>
               </a:rPr>
-              <a:t>supermarket</a:t>
+              <a:t>marketer</a:t>
             </a:r>
             <a:endParaRPr lang="en-US" sz="1200" dirty="0"/>
           </a:p>
@@ -41872,7 +42622,7 @@
                 <a:ea typeface="Calibri" pitchFamily="34" charset="-122"/>
                 <a:cs typeface="Calibri" pitchFamily="34" charset="-120"/>
               </a:rPr>
-              <a:t>A very large supermarket that sells almost everything you need.</a:t>
+              <a:t>A very large supermarket that also sells clothes, electronics, and many other items.</a:t>
             </a:r>
             <a:endParaRPr lang="en-US" sz="1200" dirty="0"/>
           </a:p>
@@ -42011,7 +42761,7 @@
                 <a:ea typeface="Calibri" pitchFamily="34" charset="-122"/>
                 <a:cs typeface="Calibri" pitchFamily="34" charset="-120"/>
               </a:rPr>
-              <a:t>The work of promoting and selling products to people.</a:t>
+              <a:t>A place, either physical or online, where people buy and sell things.</a:t>
             </a:r>
             <a:endParaRPr lang="en-US" sz="1200" dirty="0"/>
           </a:p>
@@ -42084,7 +42834,7 @@
                 <a:ea typeface="Trebuchet MS" pitchFamily="34" charset="-122"/>
                 <a:cs typeface="Trebuchet MS" pitchFamily="34" charset="-120"/>
               </a:rPr>
-              <a:t>minimarket</a:t>
+              <a:t>aftermarket</a:t>
             </a:r>
             <a:endParaRPr lang="en-US" sz="1200" dirty="0"/>
           </a:p>
@@ -42150,7 +42900,7 @@
                 <a:ea typeface="Calibri" pitchFamily="34" charset="-122"/>
                 <a:cs typeface="Calibri" pitchFamily="34" charset="-120"/>
               </a:rPr>
-              <a:t>When something was advertised and sold to buyers in the past.</a:t>
+              <a:t>The work of promoting and selling products to get people interested in buying them.</a:t>
             </a:r>
             <a:endParaRPr lang="en-US" sz="1200" dirty="0"/>
           </a:p>
@@ -42645,7 +43395,7 @@
                 <a:ea typeface="Calibri" pitchFamily="34" charset="-122"/>
                 <a:cs typeface="Calibri" pitchFamily="34" charset="-120"/>
               </a:rPr>
-              <a:t>Our class visited the local marketplace to see how people buy and sell fresh vegetables.</a:t>
+              <a:t>Our local supermarket stocks fresh fruit and vegetables every morning.</a:t>
             </a:r>
             <a:endParaRPr lang="en-US" sz="1500" dirty="0"/>
           </a:p>
@@ -42809,7 +43559,7 @@
                 <a:ea typeface="Calibri" pitchFamily="34" charset="-122"/>
                 <a:cs typeface="Calibri" pitchFamily="34" charset="-120"/>
               </a:rPr>
-              <a:t>The school fundraiser was very successful because the students were good at marketing their homemade biscuits.</a:t>
+              <a:t>The school set up a marketplace where students could sell their handmade crafts.</a:t>
             </a:r>
             <a:endParaRPr lang="en-US" sz="1500" dirty="0"/>
           </a:p>
@@ -42973,7 +43723,7 @@
                 <a:ea typeface="Calibri" pitchFamily="34" charset="-122"/>
                 <a:cs typeface="Calibri" pitchFamily="34" charset="-120"/>
               </a:rPr>
-              <a:t>Mum took us to the supermarket after school to buy ingredients for dinner.</a:t>
+              <a:t>The company spent a lot of money marketing their new product on television and social media.</a:t>
             </a:r>
             <a:endParaRPr lang="en-US" sz="1500" dirty="0"/>
           </a:p>
